--- a/Presentation.pptx
+++ b/Presentation.pptx
@@ -6,6 +6,21 @@
   </p:sldMasterIdLst>
   <p:sldIdLst>
     <p:sldId id="256" r:id="rId2"/>
+    <p:sldId id="258" r:id="rId3"/>
+    <p:sldId id="259" r:id="rId4"/>
+    <p:sldId id="260" r:id="rId5"/>
+    <p:sldId id="261" r:id="rId6"/>
+    <p:sldId id="262" r:id="rId7"/>
+    <p:sldId id="263" r:id="rId8"/>
+    <p:sldId id="264" r:id="rId9"/>
+    <p:sldId id="265" r:id="rId10"/>
+    <p:sldId id="266" r:id="rId11"/>
+    <p:sldId id="267" r:id="rId12"/>
+    <p:sldId id="268" r:id="rId13"/>
+    <p:sldId id="269" r:id="rId14"/>
+    <p:sldId id="270" r:id="rId15"/>
+    <p:sldId id="271" r:id="rId16"/>
+    <p:sldId id="272" r:id="rId17"/>
   </p:sldIdLst>
   <p:sldSz cx="12192000" cy="6858000"/>
   <p:notesSz cx="6858000" cy="9144000"/>
@@ -104,6 +119,11 @@
       </a:defRPr>
     </a:lvl9pPr>
   </p:defaultTextStyle>
+  <p:extLst>
+    <p:ext uri="{EFAFB233-063F-42B5-8137-9DF3F51BA10A}">
+      <p15:sldGuideLst xmlns:p15="http://schemas.microsoft.com/office/powerpoint/2012/main"/>
+    </p:ext>
+  </p:extLst>
 </p:presentation>
 </file>
 
@@ -256,7 +276,7 @@
           <a:p>
             <a:fld id="{A55DAF01-2C74-4DA2-AF27-E34F7387600F}" type="datetimeFigureOut">
               <a:rPr lang="en-GB" smtClean="0"/>
-              <a:t>07/02/2024</a:t>
+              <a:t>14/02/2024</a:t>
             </a:fld>
             <a:endParaRPr lang="en-GB"/>
           </a:p>
@@ -456,7 +476,7 @@
           <a:p>
             <a:fld id="{A55DAF01-2C74-4DA2-AF27-E34F7387600F}" type="datetimeFigureOut">
               <a:rPr lang="en-GB" smtClean="0"/>
-              <a:t>07/02/2024</a:t>
+              <a:t>14/02/2024</a:t>
             </a:fld>
             <a:endParaRPr lang="en-GB"/>
           </a:p>
@@ -666,7 +686,7 @@
           <a:p>
             <a:fld id="{A55DAF01-2C74-4DA2-AF27-E34F7387600F}" type="datetimeFigureOut">
               <a:rPr lang="en-GB" smtClean="0"/>
-              <a:t>07/02/2024</a:t>
+              <a:t>14/02/2024</a:t>
             </a:fld>
             <a:endParaRPr lang="en-GB"/>
           </a:p>
@@ -866,7 +886,7 @@
           <a:p>
             <a:fld id="{A55DAF01-2C74-4DA2-AF27-E34F7387600F}" type="datetimeFigureOut">
               <a:rPr lang="en-GB" smtClean="0"/>
-              <a:t>07/02/2024</a:t>
+              <a:t>14/02/2024</a:t>
             </a:fld>
             <a:endParaRPr lang="en-GB"/>
           </a:p>
@@ -1142,7 +1162,7 @@
           <a:p>
             <a:fld id="{A55DAF01-2C74-4DA2-AF27-E34F7387600F}" type="datetimeFigureOut">
               <a:rPr lang="en-GB" smtClean="0"/>
-              <a:t>07/02/2024</a:t>
+              <a:t>14/02/2024</a:t>
             </a:fld>
             <a:endParaRPr lang="en-GB"/>
           </a:p>
@@ -1410,7 +1430,7 @@
           <a:p>
             <a:fld id="{A55DAF01-2C74-4DA2-AF27-E34F7387600F}" type="datetimeFigureOut">
               <a:rPr lang="en-GB" smtClean="0"/>
-              <a:t>07/02/2024</a:t>
+              <a:t>14/02/2024</a:t>
             </a:fld>
             <a:endParaRPr lang="en-GB"/>
           </a:p>
@@ -1825,7 +1845,7 @@
           <a:p>
             <a:fld id="{A55DAF01-2C74-4DA2-AF27-E34F7387600F}" type="datetimeFigureOut">
               <a:rPr lang="en-GB" smtClean="0"/>
-              <a:t>07/02/2024</a:t>
+              <a:t>14/02/2024</a:t>
             </a:fld>
             <a:endParaRPr lang="en-GB"/>
           </a:p>
@@ -1967,7 +1987,7 @@
           <a:p>
             <a:fld id="{A55DAF01-2C74-4DA2-AF27-E34F7387600F}" type="datetimeFigureOut">
               <a:rPr lang="en-GB" smtClean="0"/>
-              <a:t>07/02/2024</a:t>
+              <a:t>14/02/2024</a:t>
             </a:fld>
             <a:endParaRPr lang="en-GB"/>
           </a:p>
@@ -2080,7 +2100,7 @@
           <a:p>
             <a:fld id="{A55DAF01-2C74-4DA2-AF27-E34F7387600F}" type="datetimeFigureOut">
               <a:rPr lang="en-GB" smtClean="0"/>
-              <a:t>07/02/2024</a:t>
+              <a:t>14/02/2024</a:t>
             </a:fld>
             <a:endParaRPr lang="en-GB"/>
           </a:p>
@@ -2393,7 +2413,7 @@
           <a:p>
             <a:fld id="{A55DAF01-2C74-4DA2-AF27-E34F7387600F}" type="datetimeFigureOut">
               <a:rPr lang="en-GB" smtClean="0"/>
-              <a:t>07/02/2024</a:t>
+              <a:t>14/02/2024</a:t>
             </a:fld>
             <a:endParaRPr lang="en-GB"/>
           </a:p>
@@ -2682,7 +2702,7 @@
           <a:p>
             <a:fld id="{A55DAF01-2C74-4DA2-AF27-E34F7387600F}" type="datetimeFigureOut">
               <a:rPr lang="en-GB" smtClean="0"/>
-              <a:t>07/02/2024</a:t>
+              <a:t>14/02/2024</a:t>
             </a:fld>
             <a:endParaRPr lang="en-GB"/>
           </a:p>
@@ -2925,7 +2945,7 @@
           <a:p>
             <a:fld id="{A55DAF01-2C74-4DA2-AF27-E34F7387600F}" type="datetimeFigureOut">
               <a:rPr lang="en-GB" smtClean="0"/>
-              <a:t>07/02/2024</a:t>
+              <a:t>14/02/2024</a:t>
             </a:fld>
             <a:endParaRPr lang="en-GB"/>
           </a:p>
@@ -3328,6 +3348,22 @@
 <file path=ppt/slides/slide1.xml><?xml version="1.0" encoding="utf-8"?>
 <p:sld xmlns:a="http://schemas.openxmlformats.org/drawingml/2006/main" xmlns:r="http://schemas.openxmlformats.org/officeDocument/2006/relationships" xmlns:p="http://schemas.openxmlformats.org/presentationml/2006/main">
   <p:cSld>
+    <p:bg>
+      <p:bgPr>
+        <a:gradFill>
+          <a:gsLst>
+            <a:gs pos="0">
+              <a:srgbClr val="008BAA"/>
+            </a:gs>
+            <a:gs pos="100000">
+              <a:srgbClr val="004E68"/>
+            </a:gs>
+          </a:gsLst>
+          <a:lin ang="0" scaled="0"/>
+        </a:gradFill>
+        <a:effectLst/>
+      </p:bgPr>
+    </p:bg>
     <p:spTree>
       <p:nvGrpSpPr>
         <p:cNvPr id="1" name=""/>
@@ -3358,44 +3394,2509 @@
             <p:ph type="ctrTitle"/>
           </p:nvPr>
         </p:nvSpPr>
-        <p:spPr/>
-        <p:txBody>
-          <a:bodyPr/>
-          <a:lstStyle/>
-          <a:p>
-            <a:endParaRPr lang="en-GB"/>
-          </a:p>
-        </p:txBody>
-      </p:sp>
-      <p:sp>
-        <p:nvSpPr>
-          <p:cNvPr id="3" name="Alcím 2">
-            <a:extLst>
-              <a:ext uri="{FF2B5EF4-FFF2-40B4-BE49-F238E27FC236}">
-                <a16:creationId xmlns:a16="http://schemas.microsoft.com/office/drawing/2014/main" id="{45D800BA-007D-25DA-8548-111854A2BF76}"/>
-              </a:ext>
-            </a:extLst>
-          </p:cNvPr>
-          <p:cNvSpPr>
-            <a:spLocks noGrp="1"/>
-          </p:cNvSpPr>
-          <p:nvPr>
-            <p:ph type="subTitle" idx="1"/>
-          </p:nvPr>
-        </p:nvSpPr>
-        <p:spPr/>
-        <p:txBody>
-          <a:bodyPr/>
-          <a:lstStyle/>
-          <a:p>
-            <a:endParaRPr lang="en-GB"/>
-          </a:p>
-        </p:txBody>
-      </p:sp>
+        <p:spPr>
+          <a:xfrm>
+            <a:off x="656527" y="2892836"/>
+            <a:ext cx="5830957" cy="927537"/>
+          </a:xfrm>
+        </p:spPr>
+        <p:txBody>
+          <a:bodyPr>
+            <a:noAutofit/>
+          </a:bodyPr>
+          <a:lstStyle/>
+          <a:p>
+            <a:r>
+              <a:rPr lang="en-US" sz="7000" dirty="0">
+                <a:solidFill>
+                  <a:schemeClr val="bg1"/>
+                </a:solidFill>
+                <a:latin typeface="Sailec-Bold" panose="00000800000000000000" pitchFamily="2" charset="0"/>
+              </a:rPr>
+              <a:t>Presentation</a:t>
+            </a:r>
+          </a:p>
+        </p:txBody>
+      </p:sp>
+      <p:pic>
+        <p:nvPicPr>
+          <p:cNvPr id="5" name="Ábra 4">
+            <a:extLst>
+              <a:ext uri="{FF2B5EF4-FFF2-40B4-BE49-F238E27FC236}">
+                <a16:creationId xmlns:a16="http://schemas.microsoft.com/office/drawing/2014/main" id="{7A9AC348-EEC1-14B5-E427-20EBB3B55117}"/>
+              </a:ext>
+            </a:extLst>
+          </p:cNvPr>
+          <p:cNvPicPr>
+            <a:picLocks noChangeAspect="1"/>
+          </p:cNvPicPr>
+          <p:nvPr/>
+        </p:nvPicPr>
+        <p:blipFill>
+          <a:blip r:embed="rId2">
+            <a:extLst>
+              <a:ext uri="{28A0092B-C50C-407E-A947-70E740481C1C}">
+                <a14:useLocalDpi xmlns:a14="http://schemas.microsoft.com/office/drawing/2010/main" val="0"/>
+              </a:ext>
+              <a:ext uri="{96DAC541-7B7A-43D3-8B79-37D633B846F1}">
+                <asvg:svgBlip xmlns:asvg="http://schemas.microsoft.com/office/drawing/2016/SVG/main" r:embed="rId3"/>
+              </a:ext>
+            </a:extLst>
+          </a:blip>
+          <a:stretch>
+            <a:fillRect/>
+          </a:stretch>
+        </p:blipFill>
+        <p:spPr>
+          <a:xfrm>
+            <a:off x="869692" y="626155"/>
+            <a:ext cx="2823614" cy="805080"/>
+          </a:xfrm>
+          <a:prstGeom prst="rect">
+            <a:avLst/>
+          </a:prstGeom>
+        </p:spPr>
+      </p:pic>
+      <p:sp>
+        <p:nvSpPr>
+          <p:cNvPr id="8" name="Szövegdoboz 7">
+            <a:extLst>
+              <a:ext uri="{FF2B5EF4-FFF2-40B4-BE49-F238E27FC236}">
+                <a16:creationId xmlns:a16="http://schemas.microsoft.com/office/drawing/2014/main" id="{691B7764-B4B8-9F59-3AAA-4019F5F0D14B}"/>
+              </a:ext>
+            </a:extLst>
+          </p:cNvPr>
+          <p:cNvSpPr txBox="1"/>
+          <p:nvPr/>
+        </p:nvSpPr>
+        <p:spPr>
+          <a:xfrm>
+            <a:off x="730543" y="3707296"/>
+            <a:ext cx="3528689" cy="630942"/>
+          </a:xfrm>
+          <a:prstGeom prst="rect">
+            <a:avLst/>
+          </a:prstGeom>
+          <a:noFill/>
+        </p:spPr>
+        <p:txBody>
+          <a:bodyPr wrap="square" rtlCol="0">
+            <a:spAutoFit/>
+          </a:bodyPr>
+          <a:lstStyle/>
+          <a:p>
+            <a:r>
+              <a:rPr lang="hu-HU" sz="3500" dirty="0">
+                <a:solidFill>
+                  <a:srgbClr val="05D5FF"/>
+                </a:solidFill>
+                <a:latin typeface="Sailec-Bold" panose="00000800000000000000" pitchFamily="2" charset="0"/>
+              </a:rPr>
+              <a:t>Dominik Major</a:t>
+            </a:r>
+          </a:p>
+        </p:txBody>
+      </p:sp>
+      <p:pic>
+        <p:nvPicPr>
+          <p:cNvPr id="14" name="Ábra 13">
+            <a:extLst>
+              <a:ext uri="{FF2B5EF4-FFF2-40B4-BE49-F238E27FC236}">
+                <a16:creationId xmlns:a16="http://schemas.microsoft.com/office/drawing/2014/main" id="{EC159495-D959-A373-4FED-2564DE557230}"/>
+              </a:ext>
+            </a:extLst>
+          </p:cNvPr>
+          <p:cNvPicPr>
+            <a:picLocks noChangeAspect="1"/>
+          </p:cNvPicPr>
+          <p:nvPr/>
+        </p:nvPicPr>
+        <p:blipFill>
+          <a:blip r:embed="rId4">
+            <a:extLst>
+              <a:ext uri="{28A0092B-C50C-407E-A947-70E740481C1C}">
+                <a14:useLocalDpi xmlns:a14="http://schemas.microsoft.com/office/drawing/2010/main" val="0"/>
+              </a:ext>
+              <a:ext uri="{96DAC541-7B7A-43D3-8B79-37D633B846F1}">
+                <asvg:svgBlip xmlns:asvg="http://schemas.microsoft.com/office/drawing/2016/SVG/main" r:embed="rId5"/>
+              </a:ext>
+            </a:extLst>
+          </a:blip>
+          <a:stretch>
+            <a:fillRect/>
+          </a:stretch>
+        </p:blipFill>
+        <p:spPr>
+          <a:xfrm>
+            <a:off x="7932769" y="1642053"/>
+            <a:ext cx="3429102" cy="3429102"/>
+          </a:xfrm>
+          <a:prstGeom prst="rect">
+            <a:avLst/>
+          </a:prstGeom>
+        </p:spPr>
+      </p:pic>
     </p:spTree>
     <p:extLst>
       <p:ext uri="{BB962C8B-B14F-4D97-AF65-F5344CB8AC3E}">
         <p14:creationId xmlns:p14="http://schemas.microsoft.com/office/powerpoint/2010/main" val="639236876"/>
+      </p:ext>
+    </p:extLst>
+  </p:cSld>
+  <p:clrMapOvr>
+    <a:masterClrMapping/>
+  </p:clrMapOvr>
+</p:sld>
+</file>
+
+<file path=ppt/slides/slide10.xml><?xml version="1.0" encoding="utf-8"?>
+<p:sld xmlns:a="http://schemas.openxmlformats.org/drawingml/2006/main" xmlns:r="http://schemas.openxmlformats.org/officeDocument/2006/relationships" xmlns:p="http://schemas.openxmlformats.org/presentationml/2006/main">
+  <p:cSld>
+    <p:spTree>
+      <p:nvGrpSpPr>
+        <p:cNvPr id="1" name="">
+          <a:extLst>
+            <a:ext uri="{FF2B5EF4-FFF2-40B4-BE49-F238E27FC236}">
+              <a16:creationId xmlns:a16="http://schemas.microsoft.com/office/drawing/2014/main" id="{1773CA08-474C-871E-A9E8-167CAD113B40}"/>
+            </a:ext>
+          </a:extLst>
+        </p:cNvPr>
+        <p:cNvGrpSpPr/>
+        <p:nvPr/>
+      </p:nvGrpSpPr>
+      <p:grpSpPr>
+        <a:xfrm>
+          <a:off x="0" y="0"/>
+          <a:ext cx="0" cy="0"/>
+          <a:chOff x="0" y="0"/>
+          <a:chExt cx="0" cy="0"/>
+        </a:xfrm>
+      </p:grpSpPr>
+      <p:sp>
+        <p:nvSpPr>
+          <p:cNvPr id="3" name="Téglalap 2">
+            <a:extLst>
+              <a:ext uri="{FF2B5EF4-FFF2-40B4-BE49-F238E27FC236}">
+                <a16:creationId xmlns:a16="http://schemas.microsoft.com/office/drawing/2014/main" id="{B6C15192-A281-4FFF-AB5B-E4A21A0BDB86}"/>
+              </a:ext>
+            </a:extLst>
+          </p:cNvPr>
+          <p:cNvSpPr/>
+          <p:nvPr/>
+        </p:nvSpPr>
+        <p:spPr>
+          <a:xfrm>
+            <a:off x="0" y="0"/>
+            <a:ext cx="12192000" cy="1310640"/>
+          </a:xfrm>
+          <a:prstGeom prst="rect">
+            <a:avLst/>
+          </a:prstGeom>
+          <a:gradFill>
+            <a:gsLst>
+              <a:gs pos="0">
+                <a:srgbClr val="008BAA"/>
+              </a:gs>
+              <a:gs pos="100000">
+                <a:srgbClr val="004E68"/>
+              </a:gs>
+            </a:gsLst>
+            <a:lin ang="0" scaled="0"/>
+          </a:gradFill>
+          <a:ln>
+            <a:noFill/>
+          </a:ln>
+          <a:effectLst>
+            <a:outerShdw blurRad="50800" dist="38100" dir="2700000" algn="tl" rotWithShape="0">
+              <a:prstClr val="black">
+                <a:alpha val="40000"/>
+              </a:prstClr>
+            </a:outerShdw>
+          </a:effectLst>
+        </p:spPr>
+        <p:style>
+          <a:lnRef idx="2">
+            <a:schemeClr val="accent1">
+              <a:shade val="15000"/>
+            </a:schemeClr>
+          </a:lnRef>
+          <a:fillRef idx="1">
+            <a:schemeClr val="accent1"/>
+          </a:fillRef>
+          <a:effectRef idx="0">
+            <a:schemeClr val="accent1"/>
+          </a:effectRef>
+          <a:fontRef idx="minor">
+            <a:schemeClr val="lt1"/>
+          </a:fontRef>
+        </p:style>
+        <p:txBody>
+          <a:bodyPr rtlCol="0" anchor="ctr"/>
+          <a:lstStyle/>
+          <a:p>
+            <a:pPr algn="ctr"/>
+            <a:r>
+              <a:rPr lang="hu-HU" sz="4000" dirty="0">
+                <a:latin typeface="Sailec-Bold" panose="00000800000000000000" pitchFamily="2" charset="0"/>
+              </a:rPr>
+              <a:t>Advertisements</a:t>
+            </a:r>
+            <a:endParaRPr lang="en-GB" sz="4000" dirty="0">
+              <a:latin typeface="Sailec-Bold" panose="00000800000000000000" pitchFamily="2" charset="0"/>
+            </a:endParaRPr>
+          </a:p>
+        </p:txBody>
+      </p:sp>
+      <p:pic>
+        <p:nvPicPr>
+          <p:cNvPr id="5" name="Kép 4">
+            <a:extLst>
+              <a:ext uri="{FF2B5EF4-FFF2-40B4-BE49-F238E27FC236}">
+                <a16:creationId xmlns:a16="http://schemas.microsoft.com/office/drawing/2014/main" id="{36D4AAB0-87A8-DD6E-6B25-4A74383BC640}"/>
+              </a:ext>
+            </a:extLst>
+          </p:cNvPr>
+          <p:cNvPicPr>
+            <a:picLocks noChangeAspect="1"/>
+          </p:cNvPicPr>
+          <p:nvPr/>
+        </p:nvPicPr>
+        <p:blipFill>
+          <a:blip r:embed="rId2"/>
+          <a:stretch>
+            <a:fillRect/>
+          </a:stretch>
+        </p:blipFill>
+        <p:spPr>
+          <a:xfrm>
+            <a:off x="1566090" y="1572571"/>
+            <a:ext cx="9059820" cy="5040000"/>
+          </a:xfrm>
+          <a:prstGeom prst="rect">
+            <a:avLst/>
+          </a:prstGeom>
+          <a:effectLst>
+            <a:glow rad="63500">
+              <a:schemeClr val="accent3">
+                <a:satMod val="175000"/>
+                <a:alpha val="40000"/>
+              </a:schemeClr>
+            </a:glow>
+          </a:effectLst>
+        </p:spPr>
+      </p:pic>
+    </p:spTree>
+    <p:extLst>
+      <p:ext uri="{BB962C8B-B14F-4D97-AF65-F5344CB8AC3E}">
+        <p14:creationId xmlns:p14="http://schemas.microsoft.com/office/powerpoint/2010/main" val="3513293904"/>
+      </p:ext>
+    </p:extLst>
+  </p:cSld>
+  <p:clrMapOvr>
+    <a:masterClrMapping/>
+  </p:clrMapOvr>
+</p:sld>
+</file>
+
+<file path=ppt/slides/slide11.xml><?xml version="1.0" encoding="utf-8"?>
+<p:sld xmlns:a="http://schemas.openxmlformats.org/drawingml/2006/main" xmlns:r="http://schemas.openxmlformats.org/officeDocument/2006/relationships" xmlns:p="http://schemas.openxmlformats.org/presentationml/2006/main">
+  <p:cSld>
+    <p:spTree>
+      <p:nvGrpSpPr>
+        <p:cNvPr id="1" name="">
+          <a:extLst>
+            <a:ext uri="{FF2B5EF4-FFF2-40B4-BE49-F238E27FC236}">
+              <a16:creationId xmlns:a16="http://schemas.microsoft.com/office/drawing/2014/main" id="{C591B5CB-A6ED-90CB-0B2B-0569C86D43A9}"/>
+            </a:ext>
+          </a:extLst>
+        </p:cNvPr>
+        <p:cNvGrpSpPr/>
+        <p:nvPr/>
+      </p:nvGrpSpPr>
+      <p:grpSpPr>
+        <a:xfrm>
+          <a:off x="0" y="0"/>
+          <a:ext cx="0" cy="0"/>
+          <a:chOff x="0" y="0"/>
+          <a:chExt cx="0" cy="0"/>
+        </a:xfrm>
+      </p:grpSpPr>
+      <p:sp>
+        <p:nvSpPr>
+          <p:cNvPr id="3" name="Téglalap 2">
+            <a:extLst>
+              <a:ext uri="{FF2B5EF4-FFF2-40B4-BE49-F238E27FC236}">
+                <a16:creationId xmlns:a16="http://schemas.microsoft.com/office/drawing/2014/main" id="{FA9277F5-5ACF-223C-5431-518BCCC9A261}"/>
+              </a:ext>
+            </a:extLst>
+          </p:cNvPr>
+          <p:cNvSpPr/>
+          <p:nvPr/>
+        </p:nvSpPr>
+        <p:spPr>
+          <a:xfrm>
+            <a:off x="0" y="0"/>
+            <a:ext cx="12192000" cy="1310640"/>
+          </a:xfrm>
+          <a:prstGeom prst="rect">
+            <a:avLst/>
+          </a:prstGeom>
+          <a:gradFill>
+            <a:gsLst>
+              <a:gs pos="0">
+                <a:srgbClr val="008BAA"/>
+              </a:gs>
+              <a:gs pos="100000">
+                <a:srgbClr val="004E68"/>
+              </a:gs>
+            </a:gsLst>
+            <a:lin ang="0" scaled="0"/>
+          </a:gradFill>
+          <a:ln>
+            <a:noFill/>
+          </a:ln>
+          <a:effectLst>
+            <a:outerShdw blurRad="50800" dist="38100" dir="2700000" algn="tl" rotWithShape="0">
+              <a:prstClr val="black">
+                <a:alpha val="40000"/>
+              </a:prstClr>
+            </a:outerShdw>
+          </a:effectLst>
+        </p:spPr>
+        <p:style>
+          <a:lnRef idx="2">
+            <a:schemeClr val="accent1">
+              <a:shade val="15000"/>
+            </a:schemeClr>
+          </a:lnRef>
+          <a:fillRef idx="1">
+            <a:schemeClr val="accent1"/>
+          </a:fillRef>
+          <a:effectRef idx="0">
+            <a:schemeClr val="accent1"/>
+          </a:effectRef>
+          <a:fontRef idx="minor">
+            <a:schemeClr val="lt1"/>
+          </a:fontRef>
+        </p:style>
+        <p:txBody>
+          <a:bodyPr rtlCol="0" anchor="ctr"/>
+          <a:lstStyle/>
+          <a:p>
+            <a:pPr algn="ctr"/>
+            <a:r>
+              <a:rPr lang="hu-HU" sz="4000" dirty="0">
+                <a:latin typeface="Sailec-Bold" panose="00000800000000000000" pitchFamily="2" charset="0"/>
+              </a:rPr>
+              <a:t>Applicants</a:t>
+            </a:r>
+            <a:endParaRPr lang="en-GB" sz="4000" dirty="0">
+              <a:latin typeface="Sailec-Bold" panose="00000800000000000000" pitchFamily="2" charset="0"/>
+            </a:endParaRPr>
+          </a:p>
+        </p:txBody>
+      </p:sp>
+      <p:pic>
+        <p:nvPicPr>
+          <p:cNvPr id="4" name="Kép 3">
+            <a:extLst>
+              <a:ext uri="{FF2B5EF4-FFF2-40B4-BE49-F238E27FC236}">
+                <a16:creationId xmlns:a16="http://schemas.microsoft.com/office/drawing/2014/main" id="{38179D3E-08AB-6883-AE36-1CFABAF2FD31}"/>
+              </a:ext>
+            </a:extLst>
+          </p:cNvPr>
+          <p:cNvPicPr>
+            <a:picLocks noChangeAspect="1"/>
+          </p:cNvPicPr>
+          <p:nvPr/>
+        </p:nvPicPr>
+        <p:blipFill>
+          <a:blip r:embed="rId2"/>
+          <a:stretch>
+            <a:fillRect/>
+          </a:stretch>
+        </p:blipFill>
+        <p:spPr>
+          <a:xfrm>
+            <a:off x="1536363" y="1603995"/>
+            <a:ext cx="9119274" cy="5040000"/>
+          </a:xfrm>
+          <a:prstGeom prst="rect">
+            <a:avLst/>
+          </a:prstGeom>
+          <a:effectLst>
+            <a:glow rad="63500">
+              <a:schemeClr val="accent3">
+                <a:satMod val="175000"/>
+                <a:alpha val="40000"/>
+              </a:schemeClr>
+            </a:glow>
+          </a:effectLst>
+        </p:spPr>
+      </p:pic>
+    </p:spTree>
+    <p:extLst>
+      <p:ext uri="{BB962C8B-B14F-4D97-AF65-F5344CB8AC3E}">
+        <p14:creationId xmlns:p14="http://schemas.microsoft.com/office/powerpoint/2010/main" val="4255277195"/>
+      </p:ext>
+    </p:extLst>
+  </p:cSld>
+  <p:clrMapOvr>
+    <a:masterClrMapping/>
+  </p:clrMapOvr>
+</p:sld>
+</file>
+
+<file path=ppt/slides/slide12.xml><?xml version="1.0" encoding="utf-8"?>
+<p:sld xmlns:a="http://schemas.openxmlformats.org/drawingml/2006/main" xmlns:r="http://schemas.openxmlformats.org/officeDocument/2006/relationships" xmlns:p="http://schemas.openxmlformats.org/presentationml/2006/main">
+  <p:cSld>
+    <p:spTree>
+      <p:nvGrpSpPr>
+        <p:cNvPr id="1" name="">
+          <a:extLst>
+            <a:ext uri="{FF2B5EF4-FFF2-40B4-BE49-F238E27FC236}">
+              <a16:creationId xmlns:a16="http://schemas.microsoft.com/office/drawing/2014/main" id="{F8AC4448-E337-2FDD-1B4E-79EB11389540}"/>
+            </a:ext>
+          </a:extLst>
+        </p:cNvPr>
+        <p:cNvGrpSpPr/>
+        <p:nvPr/>
+      </p:nvGrpSpPr>
+      <p:grpSpPr>
+        <a:xfrm>
+          <a:off x="0" y="0"/>
+          <a:ext cx="0" cy="0"/>
+          <a:chOff x="0" y="0"/>
+          <a:chExt cx="0" cy="0"/>
+        </a:xfrm>
+      </p:grpSpPr>
+      <p:sp>
+        <p:nvSpPr>
+          <p:cNvPr id="3" name="Téglalap 2">
+            <a:extLst>
+              <a:ext uri="{FF2B5EF4-FFF2-40B4-BE49-F238E27FC236}">
+                <a16:creationId xmlns:a16="http://schemas.microsoft.com/office/drawing/2014/main" id="{4951F708-5E81-584E-4E13-EFB35DC2FC8D}"/>
+              </a:ext>
+            </a:extLst>
+          </p:cNvPr>
+          <p:cNvSpPr/>
+          <p:nvPr/>
+        </p:nvSpPr>
+        <p:spPr>
+          <a:xfrm>
+            <a:off x="0" y="0"/>
+            <a:ext cx="12192000" cy="1310640"/>
+          </a:xfrm>
+          <a:prstGeom prst="rect">
+            <a:avLst/>
+          </a:prstGeom>
+          <a:gradFill>
+            <a:gsLst>
+              <a:gs pos="0">
+                <a:srgbClr val="008BAA"/>
+              </a:gs>
+              <a:gs pos="100000">
+                <a:srgbClr val="004E68"/>
+              </a:gs>
+            </a:gsLst>
+            <a:lin ang="0" scaled="0"/>
+          </a:gradFill>
+          <a:ln>
+            <a:noFill/>
+          </a:ln>
+          <a:effectLst>
+            <a:outerShdw blurRad="50800" dist="38100" dir="2700000" algn="tl" rotWithShape="0">
+              <a:prstClr val="black">
+                <a:alpha val="40000"/>
+              </a:prstClr>
+            </a:outerShdw>
+          </a:effectLst>
+        </p:spPr>
+        <p:style>
+          <a:lnRef idx="2">
+            <a:schemeClr val="accent1">
+              <a:shade val="15000"/>
+            </a:schemeClr>
+          </a:lnRef>
+          <a:fillRef idx="1">
+            <a:schemeClr val="accent1"/>
+          </a:fillRef>
+          <a:effectRef idx="0">
+            <a:schemeClr val="accent1"/>
+          </a:effectRef>
+          <a:fontRef idx="minor">
+            <a:schemeClr val="lt1"/>
+          </a:fontRef>
+        </p:style>
+        <p:txBody>
+          <a:bodyPr rtlCol="0" anchor="ctr"/>
+          <a:lstStyle/>
+          <a:p>
+            <a:pPr algn="ctr"/>
+            <a:r>
+              <a:rPr lang="hu-HU" sz="4000" dirty="0">
+                <a:latin typeface="Sailec-Bold" panose="00000800000000000000" pitchFamily="2" charset="0"/>
+              </a:rPr>
+              <a:t>Edit advertisement</a:t>
+            </a:r>
+            <a:endParaRPr lang="en-GB" sz="4000" dirty="0">
+              <a:latin typeface="Sailec-Bold" panose="00000800000000000000" pitchFamily="2" charset="0"/>
+            </a:endParaRPr>
+          </a:p>
+        </p:txBody>
+      </p:sp>
+      <p:pic>
+        <p:nvPicPr>
+          <p:cNvPr id="5" name="Kép 4">
+            <a:extLst>
+              <a:ext uri="{FF2B5EF4-FFF2-40B4-BE49-F238E27FC236}">
+                <a16:creationId xmlns:a16="http://schemas.microsoft.com/office/drawing/2014/main" id="{8F2B3F41-38C6-7596-8444-C6205D808ADB}"/>
+              </a:ext>
+            </a:extLst>
+          </p:cNvPr>
+          <p:cNvPicPr>
+            <a:picLocks noChangeAspect="1"/>
+          </p:cNvPicPr>
+          <p:nvPr/>
+        </p:nvPicPr>
+        <p:blipFill>
+          <a:blip r:embed="rId2"/>
+          <a:stretch>
+            <a:fillRect/>
+          </a:stretch>
+        </p:blipFill>
+        <p:spPr>
+          <a:xfrm>
+            <a:off x="1522953" y="1542761"/>
+            <a:ext cx="9146094" cy="5040000"/>
+          </a:xfrm>
+          <a:prstGeom prst="rect">
+            <a:avLst/>
+          </a:prstGeom>
+          <a:effectLst>
+            <a:glow rad="63500">
+              <a:schemeClr val="accent3">
+                <a:satMod val="175000"/>
+                <a:alpha val="40000"/>
+              </a:schemeClr>
+            </a:glow>
+          </a:effectLst>
+        </p:spPr>
+      </p:pic>
+    </p:spTree>
+    <p:extLst>
+      <p:ext uri="{BB962C8B-B14F-4D97-AF65-F5344CB8AC3E}">
+        <p14:creationId xmlns:p14="http://schemas.microsoft.com/office/powerpoint/2010/main" val="1663056102"/>
+      </p:ext>
+    </p:extLst>
+  </p:cSld>
+  <p:clrMapOvr>
+    <a:masterClrMapping/>
+  </p:clrMapOvr>
+</p:sld>
+</file>
+
+<file path=ppt/slides/slide13.xml><?xml version="1.0" encoding="utf-8"?>
+<p:sld xmlns:a="http://schemas.openxmlformats.org/drawingml/2006/main" xmlns:r="http://schemas.openxmlformats.org/officeDocument/2006/relationships" xmlns:p="http://schemas.openxmlformats.org/presentationml/2006/main">
+  <p:cSld>
+    <p:spTree>
+      <p:nvGrpSpPr>
+        <p:cNvPr id="1" name="">
+          <a:extLst>
+            <a:ext uri="{FF2B5EF4-FFF2-40B4-BE49-F238E27FC236}">
+              <a16:creationId xmlns:a16="http://schemas.microsoft.com/office/drawing/2014/main" id="{A752C080-7276-0FAF-A8E0-773AF12DA15C}"/>
+            </a:ext>
+          </a:extLst>
+        </p:cNvPr>
+        <p:cNvGrpSpPr/>
+        <p:nvPr/>
+      </p:nvGrpSpPr>
+      <p:grpSpPr>
+        <a:xfrm>
+          <a:off x="0" y="0"/>
+          <a:ext cx="0" cy="0"/>
+          <a:chOff x="0" y="0"/>
+          <a:chExt cx="0" cy="0"/>
+        </a:xfrm>
+      </p:grpSpPr>
+      <p:sp>
+        <p:nvSpPr>
+          <p:cNvPr id="3" name="Téglalap 2">
+            <a:extLst>
+              <a:ext uri="{FF2B5EF4-FFF2-40B4-BE49-F238E27FC236}">
+                <a16:creationId xmlns:a16="http://schemas.microsoft.com/office/drawing/2014/main" id="{BAD633E6-58E1-7027-CBB4-5DC8AB7469AC}"/>
+              </a:ext>
+            </a:extLst>
+          </p:cNvPr>
+          <p:cNvSpPr/>
+          <p:nvPr/>
+        </p:nvSpPr>
+        <p:spPr>
+          <a:xfrm>
+            <a:off x="0" y="0"/>
+            <a:ext cx="12192000" cy="1310640"/>
+          </a:xfrm>
+          <a:prstGeom prst="rect">
+            <a:avLst/>
+          </a:prstGeom>
+          <a:gradFill>
+            <a:gsLst>
+              <a:gs pos="0">
+                <a:srgbClr val="008BAA"/>
+              </a:gs>
+              <a:gs pos="100000">
+                <a:srgbClr val="004E68"/>
+              </a:gs>
+            </a:gsLst>
+            <a:lin ang="0" scaled="0"/>
+          </a:gradFill>
+          <a:ln>
+            <a:noFill/>
+          </a:ln>
+          <a:effectLst>
+            <a:outerShdw blurRad="50800" dist="38100" dir="2700000" algn="tl" rotWithShape="0">
+              <a:prstClr val="black">
+                <a:alpha val="40000"/>
+              </a:prstClr>
+            </a:outerShdw>
+          </a:effectLst>
+        </p:spPr>
+        <p:style>
+          <a:lnRef idx="2">
+            <a:schemeClr val="accent1">
+              <a:shade val="15000"/>
+            </a:schemeClr>
+          </a:lnRef>
+          <a:fillRef idx="1">
+            <a:schemeClr val="accent1"/>
+          </a:fillRef>
+          <a:effectRef idx="0">
+            <a:schemeClr val="accent1"/>
+          </a:effectRef>
+          <a:fontRef idx="minor">
+            <a:schemeClr val="lt1"/>
+          </a:fontRef>
+        </p:style>
+        <p:txBody>
+          <a:bodyPr rtlCol="0" anchor="ctr"/>
+          <a:lstStyle/>
+          <a:p>
+            <a:pPr algn="ctr"/>
+            <a:r>
+              <a:rPr lang="hu-HU" sz="4000" dirty="0">
+                <a:latin typeface="Sailec-Bold" panose="00000800000000000000" pitchFamily="2" charset="0"/>
+              </a:rPr>
+              <a:t>Edit advertisement</a:t>
+            </a:r>
+            <a:endParaRPr lang="en-GB" sz="4000" dirty="0">
+              <a:latin typeface="Sailec-Bold" panose="00000800000000000000" pitchFamily="2" charset="0"/>
+            </a:endParaRPr>
+          </a:p>
+        </p:txBody>
+      </p:sp>
+      <p:pic>
+        <p:nvPicPr>
+          <p:cNvPr id="4" name="Kép 3">
+            <a:extLst>
+              <a:ext uri="{FF2B5EF4-FFF2-40B4-BE49-F238E27FC236}">
+                <a16:creationId xmlns:a16="http://schemas.microsoft.com/office/drawing/2014/main" id="{72DFF7E6-9EE6-D264-ECD2-7648785FFE46}"/>
+              </a:ext>
+            </a:extLst>
+          </p:cNvPr>
+          <p:cNvPicPr>
+            <a:picLocks noChangeAspect="1"/>
+          </p:cNvPicPr>
+          <p:nvPr/>
+        </p:nvPicPr>
+        <p:blipFill>
+          <a:blip r:embed="rId2"/>
+          <a:stretch>
+            <a:fillRect/>
+          </a:stretch>
+        </p:blipFill>
+        <p:spPr>
+          <a:xfrm>
+            <a:off x="1604648" y="1597177"/>
+            <a:ext cx="8982704" cy="5040000"/>
+          </a:xfrm>
+          <a:prstGeom prst="rect">
+            <a:avLst/>
+          </a:prstGeom>
+          <a:effectLst>
+            <a:glow rad="63500">
+              <a:schemeClr val="accent3">
+                <a:satMod val="175000"/>
+                <a:alpha val="40000"/>
+              </a:schemeClr>
+            </a:glow>
+          </a:effectLst>
+        </p:spPr>
+      </p:pic>
+    </p:spTree>
+    <p:extLst>
+      <p:ext uri="{BB962C8B-B14F-4D97-AF65-F5344CB8AC3E}">
+        <p14:creationId xmlns:p14="http://schemas.microsoft.com/office/powerpoint/2010/main" val="2225694403"/>
+      </p:ext>
+    </p:extLst>
+  </p:cSld>
+  <p:clrMapOvr>
+    <a:masterClrMapping/>
+  </p:clrMapOvr>
+</p:sld>
+</file>
+
+<file path=ppt/slides/slide14.xml><?xml version="1.0" encoding="utf-8"?>
+<p:sld xmlns:a="http://schemas.openxmlformats.org/drawingml/2006/main" xmlns:r="http://schemas.openxmlformats.org/officeDocument/2006/relationships" xmlns:p="http://schemas.openxmlformats.org/presentationml/2006/main">
+  <p:cSld>
+    <p:spTree>
+      <p:nvGrpSpPr>
+        <p:cNvPr id="1" name="">
+          <a:extLst>
+            <a:ext uri="{FF2B5EF4-FFF2-40B4-BE49-F238E27FC236}">
+              <a16:creationId xmlns:a16="http://schemas.microsoft.com/office/drawing/2014/main" id="{08466941-42C1-CB70-6BDC-0633BBF136AF}"/>
+            </a:ext>
+          </a:extLst>
+        </p:cNvPr>
+        <p:cNvGrpSpPr/>
+        <p:nvPr/>
+      </p:nvGrpSpPr>
+      <p:grpSpPr>
+        <a:xfrm>
+          <a:off x="0" y="0"/>
+          <a:ext cx="0" cy="0"/>
+          <a:chOff x="0" y="0"/>
+          <a:chExt cx="0" cy="0"/>
+        </a:xfrm>
+      </p:grpSpPr>
+      <p:sp>
+        <p:nvSpPr>
+          <p:cNvPr id="3" name="Téglalap 2">
+            <a:extLst>
+              <a:ext uri="{FF2B5EF4-FFF2-40B4-BE49-F238E27FC236}">
+                <a16:creationId xmlns:a16="http://schemas.microsoft.com/office/drawing/2014/main" id="{868464BE-432B-CC5A-3897-B4BB1A265E39}"/>
+              </a:ext>
+            </a:extLst>
+          </p:cNvPr>
+          <p:cNvSpPr/>
+          <p:nvPr/>
+        </p:nvSpPr>
+        <p:spPr>
+          <a:xfrm>
+            <a:off x="0" y="0"/>
+            <a:ext cx="12192000" cy="1310640"/>
+          </a:xfrm>
+          <a:prstGeom prst="rect">
+            <a:avLst/>
+          </a:prstGeom>
+          <a:gradFill>
+            <a:gsLst>
+              <a:gs pos="0">
+                <a:srgbClr val="008BAA"/>
+              </a:gs>
+              <a:gs pos="100000">
+                <a:srgbClr val="004E68"/>
+              </a:gs>
+            </a:gsLst>
+            <a:lin ang="0" scaled="0"/>
+          </a:gradFill>
+          <a:ln>
+            <a:noFill/>
+          </a:ln>
+          <a:effectLst>
+            <a:outerShdw blurRad="50800" dist="38100" dir="2700000" algn="tl" rotWithShape="0">
+              <a:prstClr val="black">
+                <a:alpha val="40000"/>
+              </a:prstClr>
+            </a:outerShdw>
+          </a:effectLst>
+        </p:spPr>
+        <p:style>
+          <a:lnRef idx="2">
+            <a:schemeClr val="accent1">
+              <a:shade val="15000"/>
+            </a:schemeClr>
+          </a:lnRef>
+          <a:fillRef idx="1">
+            <a:schemeClr val="accent1"/>
+          </a:fillRef>
+          <a:effectRef idx="0">
+            <a:schemeClr val="accent1"/>
+          </a:effectRef>
+          <a:fontRef idx="minor">
+            <a:schemeClr val="lt1"/>
+          </a:fontRef>
+        </p:style>
+        <p:txBody>
+          <a:bodyPr rtlCol="0" anchor="ctr"/>
+          <a:lstStyle/>
+          <a:p>
+            <a:pPr algn="ctr"/>
+            <a:r>
+              <a:rPr lang="hu-HU" sz="4000" dirty="0">
+                <a:latin typeface="Sailec-Bold" panose="00000800000000000000" pitchFamily="2" charset="0"/>
+              </a:rPr>
+              <a:t>Advertisements</a:t>
+            </a:r>
+            <a:endParaRPr lang="en-GB" sz="4000" dirty="0">
+              <a:latin typeface="Sailec-Bold" panose="00000800000000000000" pitchFamily="2" charset="0"/>
+            </a:endParaRPr>
+          </a:p>
+        </p:txBody>
+      </p:sp>
+      <p:pic>
+        <p:nvPicPr>
+          <p:cNvPr id="5" name="Kép 4">
+            <a:extLst>
+              <a:ext uri="{FF2B5EF4-FFF2-40B4-BE49-F238E27FC236}">
+                <a16:creationId xmlns:a16="http://schemas.microsoft.com/office/drawing/2014/main" id="{351576C0-298B-DE39-BBD4-8AD8A0A629DE}"/>
+              </a:ext>
+            </a:extLst>
+          </p:cNvPr>
+          <p:cNvPicPr>
+            <a:picLocks noChangeAspect="1"/>
+          </p:cNvPicPr>
+          <p:nvPr/>
+        </p:nvPicPr>
+        <p:blipFill>
+          <a:blip r:embed="rId2"/>
+          <a:stretch>
+            <a:fillRect/>
+          </a:stretch>
+        </p:blipFill>
+        <p:spPr>
+          <a:xfrm>
+            <a:off x="1889655" y="1676742"/>
+            <a:ext cx="8412690" cy="4680000"/>
+          </a:xfrm>
+          <a:prstGeom prst="rect">
+            <a:avLst/>
+          </a:prstGeom>
+          <a:effectLst>
+            <a:glow rad="63500">
+              <a:schemeClr val="accent3">
+                <a:satMod val="175000"/>
+                <a:alpha val="40000"/>
+              </a:schemeClr>
+            </a:glow>
+          </a:effectLst>
+        </p:spPr>
+      </p:pic>
+    </p:spTree>
+    <p:extLst>
+      <p:ext uri="{BB962C8B-B14F-4D97-AF65-F5344CB8AC3E}">
+        <p14:creationId xmlns:p14="http://schemas.microsoft.com/office/powerpoint/2010/main" val="3052799118"/>
+      </p:ext>
+    </p:extLst>
+  </p:cSld>
+  <p:clrMapOvr>
+    <a:masterClrMapping/>
+  </p:clrMapOvr>
+</p:sld>
+</file>
+
+<file path=ppt/slides/slide15.xml><?xml version="1.0" encoding="utf-8"?>
+<p:sld xmlns:a="http://schemas.openxmlformats.org/drawingml/2006/main" xmlns:r="http://schemas.openxmlformats.org/officeDocument/2006/relationships" xmlns:p="http://schemas.openxmlformats.org/presentationml/2006/main">
+  <p:cSld>
+    <p:spTree>
+      <p:nvGrpSpPr>
+        <p:cNvPr id="1" name="">
+          <a:extLst>
+            <a:ext uri="{FF2B5EF4-FFF2-40B4-BE49-F238E27FC236}">
+              <a16:creationId xmlns:a16="http://schemas.microsoft.com/office/drawing/2014/main" id="{70A78BE4-E298-0698-84E8-D9CCBD6E76FC}"/>
+            </a:ext>
+          </a:extLst>
+        </p:cNvPr>
+        <p:cNvGrpSpPr/>
+        <p:nvPr/>
+      </p:nvGrpSpPr>
+      <p:grpSpPr>
+        <a:xfrm>
+          <a:off x="0" y="0"/>
+          <a:ext cx="0" cy="0"/>
+          <a:chOff x="0" y="0"/>
+          <a:chExt cx="0" cy="0"/>
+        </a:xfrm>
+      </p:grpSpPr>
+      <p:sp>
+        <p:nvSpPr>
+          <p:cNvPr id="3" name="Téglalap 2">
+            <a:extLst>
+              <a:ext uri="{FF2B5EF4-FFF2-40B4-BE49-F238E27FC236}">
+                <a16:creationId xmlns:a16="http://schemas.microsoft.com/office/drawing/2014/main" id="{1BE21D10-41E1-702C-C8A4-5842CBD6E0D0}"/>
+              </a:ext>
+            </a:extLst>
+          </p:cNvPr>
+          <p:cNvSpPr/>
+          <p:nvPr/>
+        </p:nvSpPr>
+        <p:spPr>
+          <a:xfrm>
+            <a:off x="0" y="0"/>
+            <a:ext cx="12192000" cy="1310640"/>
+          </a:xfrm>
+          <a:prstGeom prst="rect">
+            <a:avLst/>
+          </a:prstGeom>
+          <a:gradFill>
+            <a:gsLst>
+              <a:gs pos="0">
+                <a:srgbClr val="008BAA"/>
+              </a:gs>
+              <a:gs pos="100000">
+                <a:srgbClr val="004E68"/>
+              </a:gs>
+            </a:gsLst>
+            <a:lin ang="0" scaled="0"/>
+          </a:gradFill>
+          <a:ln>
+            <a:noFill/>
+          </a:ln>
+          <a:effectLst>
+            <a:outerShdw blurRad="50800" dist="38100" dir="2700000" algn="tl" rotWithShape="0">
+              <a:prstClr val="black">
+                <a:alpha val="40000"/>
+              </a:prstClr>
+            </a:outerShdw>
+          </a:effectLst>
+        </p:spPr>
+        <p:style>
+          <a:lnRef idx="2">
+            <a:schemeClr val="accent1">
+              <a:shade val="15000"/>
+            </a:schemeClr>
+          </a:lnRef>
+          <a:fillRef idx="1">
+            <a:schemeClr val="accent1"/>
+          </a:fillRef>
+          <a:effectRef idx="0">
+            <a:schemeClr val="accent1"/>
+          </a:effectRef>
+          <a:fontRef idx="minor">
+            <a:schemeClr val="lt1"/>
+          </a:fontRef>
+        </p:style>
+        <p:txBody>
+          <a:bodyPr rtlCol="0" anchor="ctr"/>
+          <a:lstStyle/>
+          <a:p>
+            <a:pPr algn="ctr"/>
+            <a:r>
+              <a:rPr lang="hu-HU" sz="4000" dirty="0">
+                <a:latin typeface="Sailec-Bold" panose="00000800000000000000" pitchFamily="2" charset="0"/>
+              </a:rPr>
+              <a:t>New advertisement</a:t>
+            </a:r>
+            <a:endParaRPr lang="en-GB" sz="4000" dirty="0">
+              <a:latin typeface="Sailec-Bold" panose="00000800000000000000" pitchFamily="2" charset="0"/>
+            </a:endParaRPr>
+          </a:p>
+        </p:txBody>
+      </p:sp>
+      <p:pic>
+        <p:nvPicPr>
+          <p:cNvPr id="4" name="Kép 3">
+            <a:extLst>
+              <a:ext uri="{FF2B5EF4-FFF2-40B4-BE49-F238E27FC236}">
+                <a16:creationId xmlns:a16="http://schemas.microsoft.com/office/drawing/2014/main" id="{09F27B04-9B55-E6DF-973C-01F7EB5F5226}"/>
+              </a:ext>
+            </a:extLst>
+          </p:cNvPr>
+          <p:cNvPicPr>
+            <a:picLocks noChangeAspect="1"/>
+          </p:cNvPicPr>
+          <p:nvPr/>
+        </p:nvPicPr>
+        <p:blipFill>
+          <a:blip r:embed="rId2"/>
+          <a:stretch>
+            <a:fillRect/>
+          </a:stretch>
+        </p:blipFill>
+        <p:spPr>
+          <a:xfrm>
+            <a:off x="1888229" y="1692000"/>
+            <a:ext cx="8415542" cy="4680000"/>
+          </a:xfrm>
+          <a:prstGeom prst="rect">
+            <a:avLst/>
+          </a:prstGeom>
+          <a:effectLst>
+            <a:glow rad="63500">
+              <a:schemeClr val="accent3">
+                <a:satMod val="175000"/>
+                <a:alpha val="40000"/>
+              </a:schemeClr>
+            </a:glow>
+          </a:effectLst>
+        </p:spPr>
+      </p:pic>
+    </p:spTree>
+    <p:extLst>
+      <p:ext uri="{BB962C8B-B14F-4D97-AF65-F5344CB8AC3E}">
+        <p14:creationId xmlns:p14="http://schemas.microsoft.com/office/powerpoint/2010/main" val="253652545"/>
+      </p:ext>
+    </p:extLst>
+  </p:cSld>
+  <p:clrMapOvr>
+    <a:masterClrMapping/>
+  </p:clrMapOvr>
+</p:sld>
+</file>
+
+<file path=ppt/slides/slide16.xml><?xml version="1.0" encoding="utf-8"?>
+<p:sld xmlns:a="http://schemas.openxmlformats.org/drawingml/2006/main" xmlns:r="http://schemas.openxmlformats.org/officeDocument/2006/relationships" xmlns:p="http://schemas.openxmlformats.org/presentationml/2006/main">
+  <p:cSld>
+    <p:bg>
+      <p:bgPr>
+        <a:gradFill>
+          <a:gsLst>
+            <a:gs pos="0">
+              <a:srgbClr val="008BAA"/>
+            </a:gs>
+            <a:gs pos="100000">
+              <a:srgbClr val="004E68"/>
+            </a:gs>
+          </a:gsLst>
+          <a:lin ang="0" scaled="0"/>
+        </a:gradFill>
+        <a:effectLst/>
+      </p:bgPr>
+    </p:bg>
+    <p:spTree>
+      <p:nvGrpSpPr>
+        <p:cNvPr id="1" name="">
+          <a:extLst>
+            <a:ext uri="{FF2B5EF4-FFF2-40B4-BE49-F238E27FC236}">
+              <a16:creationId xmlns:a16="http://schemas.microsoft.com/office/drawing/2014/main" id="{FC358EFB-B4AF-7BE7-0A44-E2EC7CEC5BBC}"/>
+            </a:ext>
+          </a:extLst>
+        </p:cNvPr>
+        <p:cNvGrpSpPr/>
+        <p:nvPr/>
+      </p:nvGrpSpPr>
+      <p:grpSpPr>
+        <a:xfrm>
+          <a:off x="0" y="0"/>
+          <a:ext cx="0" cy="0"/>
+          <a:chOff x="0" y="0"/>
+          <a:chExt cx="0" cy="0"/>
+        </a:xfrm>
+      </p:grpSpPr>
+      <p:sp>
+        <p:nvSpPr>
+          <p:cNvPr id="2" name="Cím 1">
+            <a:extLst>
+              <a:ext uri="{FF2B5EF4-FFF2-40B4-BE49-F238E27FC236}">
+                <a16:creationId xmlns:a16="http://schemas.microsoft.com/office/drawing/2014/main" id="{0C0598BF-DE2D-D177-FF0B-DC6B0F3D480A}"/>
+              </a:ext>
+            </a:extLst>
+          </p:cNvPr>
+          <p:cNvSpPr>
+            <a:spLocks noGrp="1"/>
+          </p:cNvSpPr>
+          <p:nvPr>
+            <p:ph type="ctrTitle"/>
+          </p:nvPr>
+        </p:nvSpPr>
+        <p:spPr>
+          <a:xfrm>
+            <a:off x="830129" y="3429000"/>
+            <a:ext cx="6689153" cy="927537"/>
+          </a:xfrm>
+        </p:spPr>
+        <p:txBody>
+          <a:bodyPr>
+            <a:noAutofit/>
+          </a:bodyPr>
+          <a:lstStyle/>
+          <a:p>
+            <a:pPr algn="l"/>
+            <a:r>
+              <a:rPr lang="en-GB" sz="7000" dirty="0">
+                <a:solidFill>
+                  <a:schemeClr val="bg1"/>
+                </a:solidFill>
+                <a:latin typeface="Sailec-Bold" panose="00000800000000000000" pitchFamily="2" charset="0"/>
+              </a:rPr>
+              <a:t>Thank you </a:t>
+            </a:r>
+            <a:br>
+              <a:rPr lang="en-GB" sz="7000" dirty="0">
+                <a:solidFill>
+                  <a:schemeClr val="bg1"/>
+                </a:solidFill>
+                <a:latin typeface="Sailec-Bold" panose="00000800000000000000" pitchFamily="2" charset="0"/>
+              </a:rPr>
+            </a:br>
+            <a:r>
+              <a:rPr lang="en-GB" sz="7000" dirty="0">
+                <a:solidFill>
+                  <a:schemeClr val="bg1"/>
+                </a:solidFill>
+                <a:latin typeface="Sailec-Bold" panose="00000800000000000000" pitchFamily="2" charset="0"/>
+              </a:rPr>
+              <a:t>for watching!</a:t>
+            </a:r>
+          </a:p>
+        </p:txBody>
+      </p:sp>
+      <p:pic>
+        <p:nvPicPr>
+          <p:cNvPr id="5" name="Ábra 4">
+            <a:extLst>
+              <a:ext uri="{FF2B5EF4-FFF2-40B4-BE49-F238E27FC236}">
+                <a16:creationId xmlns:a16="http://schemas.microsoft.com/office/drawing/2014/main" id="{FDE25563-6E63-5926-A20B-FA8554EB4669}"/>
+              </a:ext>
+            </a:extLst>
+          </p:cNvPr>
+          <p:cNvPicPr>
+            <a:picLocks noChangeAspect="1"/>
+          </p:cNvPicPr>
+          <p:nvPr/>
+        </p:nvPicPr>
+        <p:blipFill>
+          <a:blip r:embed="rId2">
+            <a:extLst>
+              <a:ext uri="{28A0092B-C50C-407E-A947-70E740481C1C}">
+                <a14:useLocalDpi xmlns:a14="http://schemas.microsoft.com/office/drawing/2010/main" val="0"/>
+              </a:ext>
+              <a:ext uri="{96DAC541-7B7A-43D3-8B79-37D633B846F1}">
+                <asvg:svgBlip xmlns:asvg="http://schemas.microsoft.com/office/drawing/2016/SVG/main" r:embed="rId3"/>
+              </a:ext>
+            </a:extLst>
+          </a:blip>
+          <a:stretch>
+            <a:fillRect/>
+          </a:stretch>
+        </p:blipFill>
+        <p:spPr>
+          <a:xfrm>
+            <a:off x="869692" y="626155"/>
+            <a:ext cx="2823614" cy="805080"/>
+          </a:xfrm>
+          <a:prstGeom prst="rect">
+            <a:avLst/>
+          </a:prstGeom>
+        </p:spPr>
+      </p:pic>
+      <p:pic>
+        <p:nvPicPr>
+          <p:cNvPr id="14" name="Ábra 13">
+            <a:extLst>
+              <a:ext uri="{FF2B5EF4-FFF2-40B4-BE49-F238E27FC236}">
+                <a16:creationId xmlns:a16="http://schemas.microsoft.com/office/drawing/2014/main" id="{2D8F150E-473A-FDC0-9991-7707BB249495}"/>
+              </a:ext>
+            </a:extLst>
+          </p:cNvPr>
+          <p:cNvPicPr>
+            <a:picLocks noChangeAspect="1"/>
+          </p:cNvPicPr>
+          <p:nvPr/>
+        </p:nvPicPr>
+        <p:blipFill>
+          <a:blip r:embed="rId4">
+            <a:extLst>
+              <a:ext uri="{28A0092B-C50C-407E-A947-70E740481C1C}">
+                <a14:useLocalDpi xmlns:a14="http://schemas.microsoft.com/office/drawing/2010/main" val="0"/>
+              </a:ext>
+              <a:ext uri="{96DAC541-7B7A-43D3-8B79-37D633B846F1}">
+                <asvg:svgBlip xmlns:asvg="http://schemas.microsoft.com/office/drawing/2016/SVG/main" r:embed="rId5"/>
+              </a:ext>
+            </a:extLst>
+          </a:blip>
+          <a:stretch>
+            <a:fillRect/>
+          </a:stretch>
+        </p:blipFill>
+        <p:spPr>
+          <a:xfrm>
+            <a:off x="7932769" y="1642053"/>
+            <a:ext cx="3429102" cy="3429102"/>
+          </a:xfrm>
+          <a:prstGeom prst="rect">
+            <a:avLst/>
+          </a:prstGeom>
+        </p:spPr>
+      </p:pic>
+    </p:spTree>
+    <p:extLst>
+      <p:ext uri="{BB962C8B-B14F-4D97-AF65-F5344CB8AC3E}">
+        <p14:creationId xmlns:p14="http://schemas.microsoft.com/office/powerpoint/2010/main" val="876716684"/>
+      </p:ext>
+    </p:extLst>
+  </p:cSld>
+  <p:clrMapOvr>
+    <a:masterClrMapping/>
+  </p:clrMapOvr>
+</p:sld>
+</file>
+
+<file path=ppt/slides/slide2.xml><?xml version="1.0" encoding="utf-8"?>
+<p:sld xmlns:a="http://schemas.openxmlformats.org/drawingml/2006/main" xmlns:r="http://schemas.openxmlformats.org/officeDocument/2006/relationships" xmlns:p="http://schemas.openxmlformats.org/presentationml/2006/main">
+  <p:cSld>
+    <p:spTree>
+      <p:nvGrpSpPr>
+        <p:cNvPr id="1" name="">
+          <a:extLst>
+            <a:ext uri="{FF2B5EF4-FFF2-40B4-BE49-F238E27FC236}">
+              <a16:creationId xmlns:a16="http://schemas.microsoft.com/office/drawing/2014/main" id="{6990B72A-B872-1ED0-B7AE-436EF54DAAAF}"/>
+            </a:ext>
+          </a:extLst>
+        </p:cNvPr>
+        <p:cNvGrpSpPr/>
+        <p:nvPr/>
+      </p:nvGrpSpPr>
+      <p:grpSpPr>
+        <a:xfrm>
+          <a:off x="0" y="0"/>
+          <a:ext cx="0" cy="0"/>
+          <a:chOff x="0" y="0"/>
+          <a:chExt cx="0" cy="0"/>
+        </a:xfrm>
+      </p:grpSpPr>
+      <p:sp>
+        <p:nvSpPr>
+          <p:cNvPr id="3" name="Téglalap 2">
+            <a:extLst>
+              <a:ext uri="{FF2B5EF4-FFF2-40B4-BE49-F238E27FC236}">
+                <a16:creationId xmlns:a16="http://schemas.microsoft.com/office/drawing/2014/main" id="{6BEF39BE-FC73-9693-D48A-D496FBE7433C}"/>
+              </a:ext>
+            </a:extLst>
+          </p:cNvPr>
+          <p:cNvSpPr/>
+          <p:nvPr/>
+        </p:nvSpPr>
+        <p:spPr>
+          <a:xfrm>
+            <a:off x="0" y="0"/>
+            <a:ext cx="12192000" cy="1310640"/>
+          </a:xfrm>
+          <a:prstGeom prst="rect">
+            <a:avLst/>
+          </a:prstGeom>
+          <a:gradFill>
+            <a:gsLst>
+              <a:gs pos="0">
+                <a:srgbClr val="008BAA"/>
+              </a:gs>
+              <a:gs pos="100000">
+                <a:srgbClr val="004E68"/>
+              </a:gs>
+            </a:gsLst>
+            <a:lin ang="0" scaled="0"/>
+          </a:gradFill>
+          <a:ln>
+            <a:noFill/>
+          </a:ln>
+          <a:effectLst>
+            <a:outerShdw blurRad="50800" dist="38100" dir="2700000" algn="tl" rotWithShape="0">
+              <a:prstClr val="black">
+                <a:alpha val="40000"/>
+              </a:prstClr>
+            </a:outerShdw>
+          </a:effectLst>
+        </p:spPr>
+        <p:style>
+          <a:lnRef idx="2">
+            <a:schemeClr val="accent1">
+              <a:shade val="15000"/>
+            </a:schemeClr>
+          </a:lnRef>
+          <a:fillRef idx="1">
+            <a:schemeClr val="accent1"/>
+          </a:fillRef>
+          <a:effectRef idx="0">
+            <a:schemeClr val="accent1"/>
+          </a:effectRef>
+          <a:fontRef idx="minor">
+            <a:schemeClr val="lt1"/>
+          </a:fontRef>
+        </p:style>
+        <p:txBody>
+          <a:bodyPr rtlCol="0" anchor="ctr"/>
+          <a:lstStyle/>
+          <a:p>
+            <a:pPr algn="ctr"/>
+            <a:r>
+              <a:rPr lang="hu-HU" sz="4000" dirty="0">
+                <a:latin typeface="Sailec-Bold" panose="00000800000000000000" pitchFamily="2" charset="0"/>
+              </a:rPr>
+              <a:t>Homepage</a:t>
+            </a:r>
+            <a:endParaRPr lang="en-GB" sz="4000" dirty="0">
+              <a:latin typeface="Sailec-Bold" panose="00000800000000000000" pitchFamily="2" charset="0"/>
+            </a:endParaRPr>
+          </a:p>
+        </p:txBody>
+      </p:sp>
+      <p:pic>
+        <p:nvPicPr>
+          <p:cNvPr id="8" name="Kép 7">
+            <a:extLst>
+              <a:ext uri="{FF2B5EF4-FFF2-40B4-BE49-F238E27FC236}">
+                <a16:creationId xmlns:a16="http://schemas.microsoft.com/office/drawing/2014/main" id="{22872513-F93C-5D9F-A81C-FB4E576BDEAB}"/>
+              </a:ext>
+            </a:extLst>
+          </p:cNvPr>
+          <p:cNvPicPr>
+            <a:picLocks noChangeAspect="1"/>
+          </p:cNvPicPr>
+          <p:nvPr/>
+        </p:nvPicPr>
+        <p:blipFill>
+          <a:blip r:embed="rId2"/>
+          <a:stretch>
+            <a:fillRect/>
+          </a:stretch>
+        </p:blipFill>
+        <p:spPr>
+          <a:xfrm>
+            <a:off x="1581945" y="1538798"/>
+            <a:ext cx="9028109" cy="5040000"/>
+          </a:xfrm>
+          <a:prstGeom prst="rect">
+            <a:avLst/>
+          </a:prstGeom>
+          <a:effectLst>
+            <a:glow rad="63500">
+              <a:schemeClr val="accent3">
+                <a:satMod val="175000"/>
+                <a:alpha val="40000"/>
+              </a:schemeClr>
+            </a:glow>
+          </a:effectLst>
+        </p:spPr>
+      </p:pic>
+    </p:spTree>
+    <p:extLst>
+      <p:ext uri="{BB962C8B-B14F-4D97-AF65-F5344CB8AC3E}">
+        <p14:creationId xmlns:p14="http://schemas.microsoft.com/office/powerpoint/2010/main" val="567370800"/>
+      </p:ext>
+    </p:extLst>
+  </p:cSld>
+  <p:clrMapOvr>
+    <a:masterClrMapping/>
+  </p:clrMapOvr>
+</p:sld>
+</file>
+
+<file path=ppt/slides/slide3.xml><?xml version="1.0" encoding="utf-8"?>
+<p:sld xmlns:a="http://schemas.openxmlformats.org/drawingml/2006/main" xmlns:r="http://schemas.openxmlformats.org/officeDocument/2006/relationships" xmlns:p="http://schemas.openxmlformats.org/presentationml/2006/main">
+  <p:cSld>
+    <p:spTree>
+      <p:nvGrpSpPr>
+        <p:cNvPr id="1" name="">
+          <a:extLst>
+            <a:ext uri="{FF2B5EF4-FFF2-40B4-BE49-F238E27FC236}">
+              <a16:creationId xmlns:a16="http://schemas.microsoft.com/office/drawing/2014/main" id="{C1E8D478-959F-B19B-27BF-FBE28C252690}"/>
+            </a:ext>
+          </a:extLst>
+        </p:cNvPr>
+        <p:cNvGrpSpPr/>
+        <p:nvPr/>
+      </p:nvGrpSpPr>
+      <p:grpSpPr>
+        <a:xfrm>
+          <a:off x="0" y="0"/>
+          <a:ext cx="0" cy="0"/>
+          <a:chOff x="0" y="0"/>
+          <a:chExt cx="0" cy="0"/>
+        </a:xfrm>
+      </p:grpSpPr>
+      <p:sp>
+        <p:nvSpPr>
+          <p:cNvPr id="3" name="Téglalap 2">
+            <a:extLst>
+              <a:ext uri="{FF2B5EF4-FFF2-40B4-BE49-F238E27FC236}">
+                <a16:creationId xmlns:a16="http://schemas.microsoft.com/office/drawing/2014/main" id="{04657582-FACF-F6E2-F9CA-25E716F4ECFC}"/>
+              </a:ext>
+            </a:extLst>
+          </p:cNvPr>
+          <p:cNvSpPr/>
+          <p:nvPr/>
+        </p:nvSpPr>
+        <p:spPr>
+          <a:xfrm>
+            <a:off x="0" y="0"/>
+            <a:ext cx="12192000" cy="1310640"/>
+          </a:xfrm>
+          <a:prstGeom prst="rect">
+            <a:avLst/>
+          </a:prstGeom>
+          <a:gradFill>
+            <a:gsLst>
+              <a:gs pos="0">
+                <a:srgbClr val="008BAA"/>
+              </a:gs>
+              <a:gs pos="100000">
+                <a:srgbClr val="004E68"/>
+              </a:gs>
+            </a:gsLst>
+            <a:lin ang="0" scaled="0"/>
+          </a:gradFill>
+          <a:ln>
+            <a:noFill/>
+          </a:ln>
+          <a:effectLst>
+            <a:outerShdw blurRad="50800" dist="38100" dir="2700000" algn="tl" rotWithShape="0">
+              <a:prstClr val="black">
+                <a:alpha val="40000"/>
+              </a:prstClr>
+            </a:outerShdw>
+          </a:effectLst>
+        </p:spPr>
+        <p:style>
+          <a:lnRef idx="2">
+            <a:schemeClr val="accent1">
+              <a:shade val="15000"/>
+            </a:schemeClr>
+          </a:lnRef>
+          <a:fillRef idx="1">
+            <a:schemeClr val="accent1"/>
+          </a:fillRef>
+          <a:effectRef idx="0">
+            <a:schemeClr val="accent1"/>
+          </a:effectRef>
+          <a:fontRef idx="minor">
+            <a:schemeClr val="lt1"/>
+          </a:fontRef>
+        </p:style>
+        <p:txBody>
+          <a:bodyPr rtlCol="0" anchor="ctr"/>
+          <a:lstStyle/>
+          <a:p>
+            <a:pPr algn="ctr"/>
+            <a:r>
+              <a:rPr lang="en-GB" sz="4000" dirty="0">
+                <a:latin typeface="Sailec-Bold" panose="00000800000000000000" pitchFamily="2" charset="0"/>
+              </a:rPr>
+              <a:t>Headers</a:t>
+            </a:r>
+          </a:p>
+        </p:txBody>
+      </p:sp>
+      <p:pic>
+        <p:nvPicPr>
+          <p:cNvPr id="4" name="Kép 3">
+            <a:extLst>
+              <a:ext uri="{FF2B5EF4-FFF2-40B4-BE49-F238E27FC236}">
+                <a16:creationId xmlns:a16="http://schemas.microsoft.com/office/drawing/2014/main" id="{FDC70806-5FDB-7DAF-FE97-E1B3E4467D88}"/>
+              </a:ext>
+            </a:extLst>
+          </p:cNvPr>
+          <p:cNvPicPr>
+            <a:picLocks noChangeAspect="1"/>
+          </p:cNvPicPr>
+          <p:nvPr/>
+        </p:nvPicPr>
+        <p:blipFill>
+          <a:blip r:embed="rId2"/>
+          <a:stretch>
+            <a:fillRect/>
+          </a:stretch>
+        </p:blipFill>
+        <p:spPr>
+          <a:xfrm>
+            <a:off x="399255" y="2523229"/>
+            <a:ext cx="11393490" cy="809738"/>
+          </a:xfrm>
+          <a:prstGeom prst="rect">
+            <a:avLst/>
+          </a:prstGeom>
+          <a:effectLst>
+            <a:glow rad="63500">
+              <a:schemeClr val="accent3">
+                <a:satMod val="175000"/>
+                <a:alpha val="40000"/>
+              </a:schemeClr>
+            </a:glow>
+          </a:effectLst>
+        </p:spPr>
+      </p:pic>
+      <p:pic>
+        <p:nvPicPr>
+          <p:cNvPr id="6" name="Kép 5">
+            <a:extLst>
+              <a:ext uri="{FF2B5EF4-FFF2-40B4-BE49-F238E27FC236}">
+                <a16:creationId xmlns:a16="http://schemas.microsoft.com/office/drawing/2014/main" id="{2CAB035D-BFC8-E2AF-3A34-51F439DA0BED}"/>
+              </a:ext>
+            </a:extLst>
+          </p:cNvPr>
+          <p:cNvPicPr>
+            <a:picLocks noChangeAspect="1"/>
+          </p:cNvPicPr>
+          <p:nvPr/>
+        </p:nvPicPr>
+        <p:blipFill>
+          <a:blip r:embed="rId3"/>
+          <a:stretch>
+            <a:fillRect/>
+          </a:stretch>
+        </p:blipFill>
+        <p:spPr>
+          <a:xfrm>
+            <a:off x="375439" y="3864423"/>
+            <a:ext cx="11441122" cy="1362265"/>
+          </a:xfrm>
+          <a:prstGeom prst="rect">
+            <a:avLst/>
+          </a:prstGeom>
+          <a:effectLst>
+            <a:glow rad="63500">
+              <a:schemeClr val="accent3">
+                <a:satMod val="175000"/>
+                <a:alpha val="40000"/>
+              </a:schemeClr>
+            </a:glow>
+          </a:effectLst>
+        </p:spPr>
+      </p:pic>
+    </p:spTree>
+    <p:extLst>
+      <p:ext uri="{BB962C8B-B14F-4D97-AF65-F5344CB8AC3E}">
+        <p14:creationId xmlns:p14="http://schemas.microsoft.com/office/powerpoint/2010/main" val="1667026699"/>
+      </p:ext>
+    </p:extLst>
+  </p:cSld>
+  <p:clrMapOvr>
+    <a:masterClrMapping/>
+  </p:clrMapOvr>
+</p:sld>
+</file>
+
+<file path=ppt/slides/slide4.xml><?xml version="1.0" encoding="utf-8"?>
+<p:sld xmlns:a="http://schemas.openxmlformats.org/drawingml/2006/main" xmlns:r="http://schemas.openxmlformats.org/officeDocument/2006/relationships" xmlns:p="http://schemas.openxmlformats.org/presentationml/2006/main">
+  <p:cSld>
+    <p:spTree>
+      <p:nvGrpSpPr>
+        <p:cNvPr id="1" name="">
+          <a:extLst>
+            <a:ext uri="{FF2B5EF4-FFF2-40B4-BE49-F238E27FC236}">
+              <a16:creationId xmlns:a16="http://schemas.microsoft.com/office/drawing/2014/main" id="{37C6AE17-1F46-5CBE-2B60-C9D4753BFEA1}"/>
+            </a:ext>
+          </a:extLst>
+        </p:cNvPr>
+        <p:cNvGrpSpPr/>
+        <p:nvPr/>
+      </p:nvGrpSpPr>
+      <p:grpSpPr>
+        <a:xfrm>
+          <a:off x="0" y="0"/>
+          <a:ext cx="0" cy="0"/>
+          <a:chOff x="0" y="0"/>
+          <a:chExt cx="0" cy="0"/>
+        </a:xfrm>
+      </p:grpSpPr>
+      <p:sp>
+        <p:nvSpPr>
+          <p:cNvPr id="3" name="Téglalap 2">
+            <a:extLst>
+              <a:ext uri="{FF2B5EF4-FFF2-40B4-BE49-F238E27FC236}">
+                <a16:creationId xmlns:a16="http://schemas.microsoft.com/office/drawing/2014/main" id="{3CE182C4-1A59-41E3-5F2D-592BBB8EE42A}"/>
+              </a:ext>
+            </a:extLst>
+          </p:cNvPr>
+          <p:cNvSpPr/>
+          <p:nvPr/>
+        </p:nvSpPr>
+        <p:spPr>
+          <a:xfrm>
+            <a:off x="0" y="0"/>
+            <a:ext cx="12192000" cy="1310640"/>
+          </a:xfrm>
+          <a:prstGeom prst="rect">
+            <a:avLst/>
+          </a:prstGeom>
+          <a:gradFill>
+            <a:gsLst>
+              <a:gs pos="0">
+                <a:srgbClr val="008BAA"/>
+              </a:gs>
+              <a:gs pos="100000">
+                <a:srgbClr val="004E68"/>
+              </a:gs>
+            </a:gsLst>
+            <a:lin ang="0" scaled="0"/>
+          </a:gradFill>
+          <a:ln>
+            <a:noFill/>
+          </a:ln>
+          <a:effectLst>
+            <a:outerShdw blurRad="50800" dist="38100" dir="2700000" algn="tl" rotWithShape="0">
+              <a:prstClr val="black">
+                <a:alpha val="40000"/>
+              </a:prstClr>
+            </a:outerShdw>
+          </a:effectLst>
+        </p:spPr>
+        <p:style>
+          <a:lnRef idx="2">
+            <a:schemeClr val="accent1">
+              <a:shade val="15000"/>
+            </a:schemeClr>
+          </a:lnRef>
+          <a:fillRef idx="1">
+            <a:schemeClr val="accent1"/>
+          </a:fillRef>
+          <a:effectRef idx="0">
+            <a:schemeClr val="accent1"/>
+          </a:effectRef>
+          <a:fontRef idx="minor">
+            <a:schemeClr val="lt1"/>
+          </a:fontRef>
+        </p:style>
+        <p:txBody>
+          <a:bodyPr rtlCol="0" anchor="ctr"/>
+          <a:lstStyle/>
+          <a:p>
+            <a:pPr algn="ctr"/>
+            <a:r>
+              <a:rPr lang="hu-HU" sz="4000" dirty="0">
+                <a:latin typeface="Sailec-Bold" panose="00000800000000000000" pitchFamily="2" charset="0"/>
+              </a:rPr>
+              <a:t>Advertisement</a:t>
+            </a:r>
+            <a:endParaRPr lang="en-GB" sz="4000" dirty="0">
+              <a:latin typeface="Sailec-Bold" panose="00000800000000000000" pitchFamily="2" charset="0"/>
+            </a:endParaRPr>
+          </a:p>
+        </p:txBody>
+      </p:sp>
+      <p:pic>
+        <p:nvPicPr>
+          <p:cNvPr id="8" name="Kép 7">
+            <a:extLst>
+              <a:ext uri="{FF2B5EF4-FFF2-40B4-BE49-F238E27FC236}">
+                <a16:creationId xmlns:a16="http://schemas.microsoft.com/office/drawing/2014/main" id="{B7FEFF60-3FC1-3863-ADE0-9A1405DBD5F5}"/>
+              </a:ext>
+            </a:extLst>
+          </p:cNvPr>
+          <p:cNvPicPr>
+            <a:picLocks noChangeAspect="1"/>
+          </p:cNvPicPr>
+          <p:nvPr/>
+        </p:nvPicPr>
+        <p:blipFill>
+          <a:blip r:embed="rId2"/>
+          <a:stretch>
+            <a:fillRect/>
+          </a:stretch>
+        </p:blipFill>
+        <p:spPr>
+          <a:xfrm>
+            <a:off x="1590888" y="1564944"/>
+            <a:ext cx="9010224" cy="5040000"/>
+          </a:xfrm>
+          <a:prstGeom prst="rect">
+            <a:avLst/>
+          </a:prstGeom>
+          <a:effectLst>
+            <a:glow rad="63500">
+              <a:schemeClr val="accent3">
+                <a:satMod val="175000"/>
+                <a:alpha val="40000"/>
+              </a:schemeClr>
+            </a:glow>
+          </a:effectLst>
+        </p:spPr>
+      </p:pic>
+      <p:pic>
+        <p:nvPicPr>
+          <p:cNvPr id="10" name="Kép 9">
+            <a:extLst>
+              <a:ext uri="{FF2B5EF4-FFF2-40B4-BE49-F238E27FC236}">
+                <a16:creationId xmlns:a16="http://schemas.microsoft.com/office/drawing/2014/main" id="{F204CC45-5F36-2981-944C-86618885B930}"/>
+              </a:ext>
+            </a:extLst>
+          </p:cNvPr>
+          <p:cNvPicPr>
+            <a:picLocks noChangeAspect="1"/>
+          </p:cNvPicPr>
+          <p:nvPr/>
+        </p:nvPicPr>
+        <p:blipFill>
+          <a:blip r:embed="rId3"/>
+          <a:stretch>
+            <a:fillRect/>
+          </a:stretch>
+        </p:blipFill>
+        <p:spPr>
+          <a:xfrm>
+            <a:off x="8258105" y="4008120"/>
+            <a:ext cx="821402" cy="286716"/>
+          </a:xfrm>
+          <a:prstGeom prst="rect">
+            <a:avLst/>
+          </a:prstGeom>
+        </p:spPr>
+      </p:pic>
+    </p:spTree>
+    <p:extLst>
+      <p:ext uri="{BB962C8B-B14F-4D97-AF65-F5344CB8AC3E}">
+        <p14:creationId xmlns:p14="http://schemas.microsoft.com/office/powerpoint/2010/main" val="515747914"/>
+      </p:ext>
+    </p:extLst>
+  </p:cSld>
+  <p:clrMapOvr>
+    <a:masterClrMapping/>
+  </p:clrMapOvr>
+</p:sld>
+</file>
+
+<file path=ppt/slides/slide5.xml><?xml version="1.0" encoding="utf-8"?>
+<p:sld xmlns:a="http://schemas.openxmlformats.org/drawingml/2006/main" xmlns:r="http://schemas.openxmlformats.org/officeDocument/2006/relationships" xmlns:p="http://schemas.openxmlformats.org/presentationml/2006/main">
+  <p:cSld>
+    <p:spTree>
+      <p:nvGrpSpPr>
+        <p:cNvPr id="1" name="">
+          <a:extLst>
+            <a:ext uri="{FF2B5EF4-FFF2-40B4-BE49-F238E27FC236}">
+              <a16:creationId xmlns:a16="http://schemas.microsoft.com/office/drawing/2014/main" id="{7534F283-D05B-7AA7-EA44-F2C851D82F34}"/>
+            </a:ext>
+          </a:extLst>
+        </p:cNvPr>
+        <p:cNvGrpSpPr/>
+        <p:nvPr/>
+      </p:nvGrpSpPr>
+      <p:grpSpPr>
+        <a:xfrm>
+          <a:off x="0" y="0"/>
+          <a:ext cx="0" cy="0"/>
+          <a:chOff x="0" y="0"/>
+          <a:chExt cx="0" cy="0"/>
+        </a:xfrm>
+      </p:grpSpPr>
+      <p:sp>
+        <p:nvSpPr>
+          <p:cNvPr id="3" name="Téglalap 2">
+            <a:extLst>
+              <a:ext uri="{FF2B5EF4-FFF2-40B4-BE49-F238E27FC236}">
+                <a16:creationId xmlns:a16="http://schemas.microsoft.com/office/drawing/2014/main" id="{D859608B-EB44-7BB8-1DD3-2E2CCF0CE964}"/>
+              </a:ext>
+            </a:extLst>
+          </p:cNvPr>
+          <p:cNvSpPr/>
+          <p:nvPr/>
+        </p:nvSpPr>
+        <p:spPr>
+          <a:xfrm>
+            <a:off x="0" y="0"/>
+            <a:ext cx="12192000" cy="1310640"/>
+          </a:xfrm>
+          <a:prstGeom prst="rect">
+            <a:avLst/>
+          </a:prstGeom>
+          <a:gradFill>
+            <a:gsLst>
+              <a:gs pos="0">
+                <a:srgbClr val="008BAA"/>
+              </a:gs>
+              <a:gs pos="100000">
+                <a:srgbClr val="004E68"/>
+              </a:gs>
+            </a:gsLst>
+            <a:lin ang="0" scaled="0"/>
+          </a:gradFill>
+          <a:ln>
+            <a:noFill/>
+          </a:ln>
+          <a:effectLst>
+            <a:outerShdw blurRad="50800" dist="38100" dir="2700000" algn="tl" rotWithShape="0">
+              <a:prstClr val="black">
+                <a:alpha val="40000"/>
+              </a:prstClr>
+            </a:outerShdw>
+          </a:effectLst>
+        </p:spPr>
+        <p:style>
+          <a:lnRef idx="2">
+            <a:schemeClr val="accent1">
+              <a:shade val="15000"/>
+            </a:schemeClr>
+          </a:lnRef>
+          <a:fillRef idx="1">
+            <a:schemeClr val="accent1"/>
+          </a:fillRef>
+          <a:effectRef idx="0">
+            <a:schemeClr val="accent1"/>
+          </a:effectRef>
+          <a:fontRef idx="minor">
+            <a:schemeClr val="lt1"/>
+          </a:fontRef>
+        </p:style>
+        <p:txBody>
+          <a:bodyPr rtlCol="0" anchor="ctr"/>
+          <a:lstStyle/>
+          <a:p>
+            <a:pPr algn="ctr"/>
+            <a:r>
+              <a:rPr lang="en-GB" sz="4000" dirty="0">
+                <a:latin typeface="Sailec-Bold" panose="00000800000000000000" pitchFamily="2" charset="0"/>
+              </a:rPr>
+              <a:t>Contact</a:t>
+            </a:r>
+            <a:r>
+              <a:rPr lang="hu-HU" sz="4000" dirty="0">
+                <a:latin typeface="Sailec-Bold" panose="00000800000000000000" pitchFamily="2" charset="0"/>
+              </a:rPr>
+              <a:t> </a:t>
+            </a:r>
+            <a:r>
+              <a:rPr lang="en-US" sz="4000" dirty="0">
+                <a:latin typeface="Sailec-Bold" panose="00000800000000000000" pitchFamily="2" charset="0"/>
+              </a:rPr>
+              <a:t>page</a:t>
+            </a:r>
+          </a:p>
+        </p:txBody>
+      </p:sp>
+      <p:pic>
+        <p:nvPicPr>
+          <p:cNvPr id="4" name="Kép 3">
+            <a:extLst>
+              <a:ext uri="{FF2B5EF4-FFF2-40B4-BE49-F238E27FC236}">
+                <a16:creationId xmlns:a16="http://schemas.microsoft.com/office/drawing/2014/main" id="{4BD62615-C495-B2E2-56AF-1490C89CACED}"/>
+              </a:ext>
+            </a:extLst>
+          </p:cNvPr>
+          <p:cNvPicPr>
+            <a:picLocks noChangeAspect="1"/>
+          </p:cNvPicPr>
+          <p:nvPr/>
+        </p:nvPicPr>
+        <p:blipFill>
+          <a:blip r:embed="rId2"/>
+          <a:stretch>
+            <a:fillRect/>
+          </a:stretch>
+        </p:blipFill>
+        <p:spPr>
+          <a:xfrm>
+            <a:off x="1516975" y="1531031"/>
+            <a:ext cx="9158049" cy="5040000"/>
+          </a:xfrm>
+          <a:prstGeom prst="rect">
+            <a:avLst/>
+          </a:prstGeom>
+          <a:effectLst>
+            <a:glow rad="63500">
+              <a:schemeClr val="accent3">
+                <a:satMod val="175000"/>
+                <a:alpha val="40000"/>
+              </a:schemeClr>
+            </a:glow>
+          </a:effectLst>
+        </p:spPr>
+      </p:pic>
+    </p:spTree>
+    <p:extLst>
+      <p:ext uri="{BB962C8B-B14F-4D97-AF65-F5344CB8AC3E}">
+        <p14:creationId xmlns:p14="http://schemas.microsoft.com/office/powerpoint/2010/main" val="110910644"/>
+      </p:ext>
+    </p:extLst>
+  </p:cSld>
+  <p:clrMapOvr>
+    <a:masterClrMapping/>
+  </p:clrMapOvr>
+</p:sld>
+</file>
+
+<file path=ppt/slides/slide6.xml><?xml version="1.0" encoding="utf-8"?>
+<p:sld xmlns:a="http://schemas.openxmlformats.org/drawingml/2006/main" xmlns:r="http://schemas.openxmlformats.org/officeDocument/2006/relationships" xmlns:p="http://schemas.openxmlformats.org/presentationml/2006/main">
+  <p:cSld>
+    <p:spTree>
+      <p:nvGrpSpPr>
+        <p:cNvPr id="1" name="">
+          <a:extLst>
+            <a:ext uri="{FF2B5EF4-FFF2-40B4-BE49-F238E27FC236}">
+              <a16:creationId xmlns:a16="http://schemas.microsoft.com/office/drawing/2014/main" id="{1D08AA66-9935-9223-09A2-7CB4D1458DE2}"/>
+            </a:ext>
+          </a:extLst>
+        </p:cNvPr>
+        <p:cNvGrpSpPr/>
+        <p:nvPr/>
+      </p:nvGrpSpPr>
+      <p:grpSpPr>
+        <a:xfrm>
+          <a:off x="0" y="0"/>
+          <a:ext cx="0" cy="0"/>
+          <a:chOff x="0" y="0"/>
+          <a:chExt cx="0" cy="0"/>
+        </a:xfrm>
+      </p:grpSpPr>
+      <p:sp>
+        <p:nvSpPr>
+          <p:cNvPr id="3" name="Téglalap 2">
+            <a:extLst>
+              <a:ext uri="{FF2B5EF4-FFF2-40B4-BE49-F238E27FC236}">
+                <a16:creationId xmlns:a16="http://schemas.microsoft.com/office/drawing/2014/main" id="{6CBC1C0F-7F4F-15FD-E051-ADF483D2ABCE}"/>
+              </a:ext>
+            </a:extLst>
+          </p:cNvPr>
+          <p:cNvSpPr/>
+          <p:nvPr/>
+        </p:nvSpPr>
+        <p:spPr>
+          <a:xfrm>
+            <a:off x="0" y="0"/>
+            <a:ext cx="12192000" cy="1310640"/>
+          </a:xfrm>
+          <a:prstGeom prst="rect">
+            <a:avLst/>
+          </a:prstGeom>
+          <a:gradFill>
+            <a:gsLst>
+              <a:gs pos="0">
+                <a:srgbClr val="008BAA"/>
+              </a:gs>
+              <a:gs pos="100000">
+                <a:srgbClr val="004E68"/>
+              </a:gs>
+            </a:gsLst>
+            <a:lin ang="0" scaled="0"/>
+          </a:gradFill>
+          <a:ln>
+            <a:noFill/>
+          </a:ln>
+          <a:effectLst>
+            <a:outerShdw blurRad="50800" dist="38100" dir="2700000" algn="tl" rotWithShape="0">
+              <a:prstClr val="black">
+                <a:alpha val="40000"/>
+              </a:prstClr>
+            </a:outerShdw>
+          </a:effectLst>
+        </p:spPr>
+        <p:style>
+          <a:lnRef idx="2">
+            <a:schemeClr val="accent1">
+              <a:shade val="15000"/>
+            </a:schemeClr>
+          </a:lnRef>
+          <a:fillRef idx="1">
+            <a:schemeClr val="accent1"/>
+          </a:fillRef>
+          <a:effectRef idx="0">
+            <a:schemeClr val="accent1"/>
+          </a:effectRef>
+          <a:fontRef idx="minor">
+            <a:schemeClr val="lt1"/>
+          </a:fontRef>
+        </p:style>
+        <p:txBody>
+          <a:bodyPr rtlCol="0" anchor="ctr"/>
+          <a:lstStyle/>
+          <a:p>
+            <a:pPr algn="ctr"/>
+            <a:r>
+              <a:rPr lang="en-US" sz="4000" dirty="0">
+                <a:latin typeface="Sailec-Bold" panose="00000800000000000000" pitchFamily="2" charset="0"/>
+              </a:rPr>
+              <a:t>Register</a:t>
+            </a:r>
+            <a:r>
+              <a:rPr lang="hu-HU" sz="4000" dirty="0">
+                <a:latin typeface="Sailec-Bold" panose="00000800000000000000" pitchFamily="2" charset="0"/>
+              </a:rPr>
+              <a:t> </a:t>
+            </a:r>
+            <a:r>
+              <a:rPr lang="en-GB" sz="4000" dirty="0">
+                <a:latin typeface="Sailec-Bold" panose="00000800000000000000" pitchFamily="2" charset="0"/>
+              </a:rPr>
+              <a:t>page</a:t>
+            </a:r>
+          </a:p>
+        </p:txBody>
+      </p:sp>
+      <p:pic>
+        <p:nvPicPr>
+          <p:cNvPr id="5" name="Kép 4">
+            <a:extLst>
+              <a:ext uri="{FF2B5EF4-FFF2-40B4-BE49-F238E27FC236}">
+                <a16:creationId xmlns:a16="http://schemas.microsoft.com/office/drawing/2014/main" id="{D2940998-A66E-463C-4219-02F2B6AE306E}"/>
+              </a:ext>
+            </a:extLst>
+          </p:cNvPr>
+          <p:cNvPicPr>
+            <a:picLocks noChangeAspect="1"/>
+          </p:cNvPicPr>
+          <p:nvPr/>
+        </p:nvPicPr>
+        <p:blipFill>
+          <a:blip r:embed="rId2"/>
+          <a:stretch>
+            <a:fillRect/>
+          </a:stretch>
+        </p:blipFill>
+        <p:spPr>
+          <a:xfrm>
+            <a:off x="1546213" y="1529957"/>
+            <a:ext cx="9099573" cy="5040000"/>
+          </a:xfrm>
+          <a:prstGeom prst="rect">
+            <a:avLst/>
+          </a:prstGeom>
+          <a:effectLst>
+            <a:glow rad="63500">
+              <a:schemeClr val="accent3">
+                <a:satMod val="175000"/>
+                <a:alpha val="40000"/>
+              </a:schemeClr>
+            </a:glow>
+          </a:effectLst>
+        </p:spPr>
+      </p:pic>
+    </p:spTree>
+    <p:extLst>
+      <p:ext uri="{BB962C8B-B14F-4D97-AF65-F5344CB8AC3E}">
+        <p14:creationId xmlns:p14="http://schemas.microsoft.com/office/powerpoint/2010/main" val="3960226892"/>
+      </p:ext>
+    </p:extLst>
+  </p:cSld>
+  <p:clrMapOvr>
+    <a:masterClrMapping/>
+  </p:clrMapOvr>
+</p:sld>
+</file>
+
+<file path=ppt/slides/slide7.xml><?xml version="1.0" encoding="utf-8"?>
+<p:sld xmlns:a="http://schemas.openxmlformats.org/drawingml/2006/main" xmlns:r="http://schemas.openxmlformats.org/officeDocument/2006/relationships" xmlns:p="http://schemas.openxmlformats.org/presentationml/2006/main">
+  <p:cSld>
+    <p:spTree>
+      <p:nvGrpSpPr>
+        <p:cNvPr id="1" name="">
+          <a:extLst>
+            <a:ext uri="{FF2B5EF4-FFF2-40B4-BE49-F238E27FC236}">
+              <a16:creationId xmlns:a16="http://schemas.microsoft.com/office/drawing/2014/main" id="{AFD2E438-C698-4763-CD47-FE5508BDE581}"/>
+            </a:ext>
+          </a:extLst>
+        </p:cNvPr>
+        <p:cNvGrpSpPr/>
+        <p:nvPr/>
+      </p:nvGrpSpPr>
+      <p:grpSpPr>
+        <a:xfrm>
+          <a:off x="0" y="0"/>
+          <a:ext cx="0" cy="0"/>
+          <a:chOff x="0" y="0"/>
+          <a:chExt cx="0" cy="0"/>
+        </a:xfrm>
+      </p:grpSpPr>
+      <p:sp>
+        <p:nvSpPr>
+          <p:cNvPr id="3" name="Téglalap 2">
+            <a:extLst>
+              <a:ext uri="{FF2B5EF4-FFF2-40B4-BE49-F238E27FC236}">
+                <a16:creationId xmlns:a16="http://schemas.microsoft.com/office/drawing/2014/main" id="{73007266-A981-6CE9-6573-3EAE80CF1EC8}"/>
+              </a:ext>
+            </a:extLst>
+          </p:cNvPr>
+          <p:cNvSpPr/>
+          <p:nvPr/>
+        </p:nvSpPr>
+        <p:spPr>
+          <a:xfrm>
+            <a:off x="0" y="0"/>
+            <a:ext cx="12192000" cy="1310640"/>
+          </a:xfrm>
+          <a:prstGeom prst="rect">
+            <a:avLst/>
+          </a:prstGeom>
+          <a:gradFill>
+            <a:gsLst>
+              <a:gs pos="0">
+                <a:srgbClr val="008BAA"/>
+              </a:gs>
+              <a:gs pos="100000">
+                <a:srgbClr val="004E68"/>
+              </a:gs>
+            </a:gsLst>
+            <a:lin ang="0" scaled="0"/>
+          </a:gradFill>
+          <a:ln>
+            <a:noFill/>
+          </a:ln>
+          <a:effectLst>
+            <a:outerShdw blurRad="50800" dist="38100" dir="2700000" algn="tl" rotWithShape="0">
+              <a:prstClr val="black">
+                <a:alpha val="40000"/>
+              </a:prstClr>
+            </a:outerShdw>
+          </a:effectLst>
+        </p:spPr>
+        <p:style>
+          <a:lnRef idx="2">
+            <a:schemeClr val="accent1">
+              <a:shade val="15000"/>
+            </a:schemeClr>
+          </a:lnRef>
+          <a:fillRef idx="1">
+            <a:schemeClr val="accent1"/>
+          </a:fillRef>
+          <a:effectRef idx="0">
+            <a:schemeClr val="accent1"/>
+          </a:effectRef>
+          <a:fontRef idx="minor">
+            <a:schemeClr val="lt1"/>
+          </a:fontRef>
+        </p:style>
+        <p:txBody>
+          <a:bodyPr rtlCol="0" anchor="ctr"/>
+          <a:lstStyle/>
+          <a:p>
+            <a:pPr algn="ctr"/>
+            <a:r>
+              <a:rPr lang="en-GB" sz="4000" dirty="0">
+                <a:latin typeface="Sailec-Bold" panose="00000800000000000000" pitchFamily="2" charset="0"/>
+              </a:rPr>
+              <a:t>Register page</a:t>
+            </a:r>
+          </a:p>
+        </p:txBody>
+      </p:sp>
+      <p:pic>
+        <p:nvPicPr>
+          <p:cNvPr id="4" name="Kép 3">
+            <a:extLst>
+              <a:ext uri="{FF2B5EF4-FFF2-40B4-BE49-F238E27FC236}">
+                <a16:creationId xmlns:a16="http://schemas.microsoft.com/office/drawing/2014/main" id="{24B75B36-D4DE-1046-D863-70FBDF021243}"/>
+              </a:ext>
+            </a:extLst>
+          </p:cNvPr>
+          <p:cNvPicPr>
+            <a:picLocks noChangeAspect="1"/>
+          </p:cNvPicPr>
+          <p:nvPr/>
+        </p:nvPicPr>
+        <p:blipFill>
+          <a:blip r:embed="rId2"/>
+          <a:stretch>
+            <a:fillRect/>
+          </a:stretch>
+        </p:blipFill>
+        <p:spPr>
+          <a:xfrm>
+            <a:off x="1565362" y="1614012"/>
+            <a:ext cx="9061276" cy="5040000"/>
+          </a:xfrm>
+          <a:prstGeom prst="rect">
+            <a:avLst/>
+          </a:prstGeom>
+          <a:effectLst>
+            <a:glow rad="63500">
+              <a:schemeClr val="accent3">
+                <a:satMod val="175000"/>
+                <a:alpha val="40000"/>
+              </a:schemeClr>
+            </a:glow>
+          </a:effectLst>
+        </p:spPr>
+      </p:pic>
+    </p:spTree>
+    <p:extLst>
+      <p:ext uri="{BB962C8B-B14F-4D97-AF65-F5344CB8AC3E}">
+        <p14:creationId xmlns:p14="http://schemas.microsoft.com/office/powerpoint/2010/main" val="3774566170"/>
+      </p:ext>
+    </p:extLst>
+  </p:cSld>
+  <p:clrMapOvr>
+    <a:masterClrMapping/>
+  </p:clrMapOvr>
+</p:sld>
+</file>
+
+<file path=ppt/slides/slide8.xml><?xml version="1.0" encoding="utf-8"?>
+<p:sld xmlns:a="http://schemas.openxmlformats.org/drawingml/2006/main" xmlns:r="http://schemas.openxmlformats.org/officeDocument/2006/relationships" xmlns:p="http://schemas.openxmlformats.org/presentationml/2006/main">
+  <p:cSld>
+    <p:spTree>
+      <p:nvGrpSpPr>
+        <p:cNvPr id="1" name="">
+          <a:extLst>
+            <a:ext uri="{FF2B5EF4-FFF2-40B4-BE49-F238E27FC236}">
+              <a16:creationId xmlns:a16="http://schemas.microsoft.com/office/drawing/2014/main" id="{10451914-4995-7BDD-9E01-9A123E0ED576}"/>
+            </a:ext>
+          </a:extLst>
+        </p:cNvPr>
+        <p:cNvGrpSpPr/>
+        <p:nvPr/>
+      </p:nvGrpSpPr>
+      <p:grpSpPr>
+        <a:xfrm>
+          <a:off x="0" y="0"/>
+          <a:ext cx="0" cy="0"/>
+          <a:chOff x="0" y="0"/>
+          <a:chExt cx="0" cy="0"/>
+        </a:xfrm>
+      </p:grpSpPr>
+      <p:sp>
+        <p:nvSpPr>
+          <p:cNvPr id="3" name="Téglalap 2">
+            <a:extLst>
+              <a:ext uri="{FF2B5EF4-FFF2-40B4-BE49-F238E27FC236}">
+                <a16:creationId xmlns:a16="http://schemas.microsoft.com/office/drawing/2014/main" id="{99BD79F0-E630-6971-6D52-D4C3B49C1E8B}"/>
+              </a:ext>
+            </a:extLst>
+          </p:cNvPr>
+          <p:cNvSpPr/>
+          <p:nvPr/>
+        </p:nvSpPr>
+        <p:spPr>
+          <a:xfrm>
+            <a:off x="0" y="0"/>
+            <a:ext cx="12192000" cy="1310640"/>
+          </a:xfrm>
+          <a:prstGeom prst="rect">
+            <a:avLst/>
+          </a:prstGeom>
+          <a:gradFill>
+            <a:gsLst>
+              <a:gs pos="0">
+                <a:srgbClr val="008BAA"/>
+              </a:gs>
+              <a:gs pos="100000">
+                <a:srgbClr val="004E68"/>
+              </a:gs>
+            </a:gsLst>
+            <a:lin ang="0" scaled="0"/>
+          </a:gradFill>
+          <a:ln>
+            <a:noFill/>
+          </a:ln>
+          <a:effectLst>
+            <a:outerShdw blurRad="50800" dist="38100" dir="2700000" algn="tl" rotWithShape="0">
+              <a:prstClr val="black">
+                <a:alpha val="40000"/>
+              </a:prstClr>
+            </a:outerShdw>
+          </a:effectLst>
+        </p:spPr>
+        <p:style>
+          <a:lnRef idx="2">
+            <a:schemeClr val="accent1">
+              <a:shade val="15000"/>
+            </a:schemeClr>
+          </a:lnRef>
+          <a:fillRef idx="1">
+            <a:schemeClr val="accent1"/>
+          </a:fillRef>
+          <a:effectRef idx="0">
+            <a:schemeClr val="accent1"/>
+          </a:effectRef>
+          <a:fontRef idx="minor">
+            <a:schemeClr val="lt1"/>
+          </a:fontRef>
+        </p:style>
+        <p:txBody>
+          <a:bodyPr rtlCol="0" anchor="ctr"/>
+          <a:lstStyle/>
+          <a:p>
+            <a:pPr algn="ctr"/>
+            <a:r>
+              <a:rPr lang="hu-HU" sz="4000" dirty="0">
+                <a:latin typeface="Sailec-Bold" panose="00000800000000000000" pitchFamily="2" charset="0"/>
+              </a:rPr>
+              <a:t>Login </a:t>
+            </a:r>
+            <a:r>
+              <a:rPr lang="en-GB" sz="4000" dirty="0">
+                <a:latin typeface="Sailec-Bold" panose="00000800000000000000" pitchFamily="2" charset="0"/>
+              </a:rPr>
+              <a:t>page</a:t>
+            </a:r>
+          </a:p>
+        </p:txBody>
+      </p:sp>
+      <p:pic>
+        <p:nvPicPr>
+          <p:cNvPr id="5" name="Kép 4">
+            <a:extLst>
+              <a:ext uri="{FF2B5EF4-FFF2-40B4-BE49-F238E27FC236}">
+                <a16:creationId xmlns:a16="http://schemas.microsoft.com/office/drawing/2014/main" id="{2617A957-A475-19D6-4353-44E1B2D5CD3E}"/>
+              </a:ext>
+            </a:extLst>
+          </p:cNvPr>
+          <p:cNvPicPr>
+            <a:picLocks noChangeAspect="1"/>
+          </p:cNvPicPr>
+          <p:nvPr/>
+        </p:nvPicPr>
+        <p:blipFill>
+          <a:blip r:embed="rId2"/>
+          <a:stretch>
+            <a:fillRect/>
+          </a:stretch>
+        </p:blipFill>
+        <p:spPr>
+          <a:xfrm>
+            <a:off x="1588714" y="1563202"/>
+            <a:ext cx="9014572" cy="5040000"/>
+          </a:xfrm>
+          <a:prstGeom prst="rect">
+            <a:avLst/>
+          </a:prstGeom>
+          <a:effectLst>
+            <a:glow rad="63500">
+              <a:schemeClr val="accent3">
+                <a:satMod val="175000"/>
+                <a:alpha val="40000"/>
+              </a:schemeClr>
+            </a:glow>
+          </a:effectLst>
+        </p:spPr>
+      </p:pic>
+    </p:spTree>
+    <p:extLst>
+      <p:ext uri="{BB962C8B-B14F-4D97-AF65-F5344CB8AC3E}">
+        <p14:creationId xmlns:p14="http://schemas.microsoft.com/office/powerpoint/2010/main" val="164975231"/>
+      </p:ext>
+    </p:extLst>
+  </p:cSld>
+  <p:clrMapOvr>
+    <a:masterClrMapping/>
+  </p:clrMapOvr>
+</p:sld>
+</file>
+
+<file path=ppt/slides/slide9.xml><?xml version="1.0" encoding="utf-8"?>
+<p:sld xmlns:a="http://schemas.openxmlformats.org/drawingml/2006/main" xmlns:r="http://schemas.openxmlformats.org/officeDocument/2006/relationships" xmlns:p="http://schemas.openxmlformats.org/presentationml/2006/main">
+  <p:cSld>
+    <p:spTree>
+      <p:nvGrpSpPr>
+        <p:cNvPr id="1" name="">
+          <a:extLst>
+            <a:ext uri="{FF2B5EF4-FFF2-40B4-BE49-F238E27FC236}">
+              <a16:creationId xmlns:a16="http://schemas.microsoft.com/office/drawing/2014/main" id="{DFF9268D-8DEE-D991-2A97-F6D773EEE7F9}"/>
+            </a:ext>
+          </a:extLst>
+        </p:cNvPr>
+        <p:cNvGrpSpPr/>
+        <p:nvPr/>
+      </p:nvGrpSpPr>
+      <p:grpSpPr>
+        <a:xfrm>
+          <a:off x="0" y="0"/>
+          <a:ext cx="0" cy="0"/>
+          <a:chOff x="0" y="0"/>
+          <a:chExt cx="0" cy="0"/>
+        </a:xfrm>
+      </p:grpSpPr>
+      <p:sp>
+        <p:nvSpPr>
+          <p:cNvPr id="3" name="Téglalap 2">
+            <a:extLst>
+              <a:ext uri="{FF2B5EF4-FFF2-40B4-BE49-F238E27FC236}">
+                <a16:creationId xmlns:a16="http://schemas.microsoft.com/office/drawing/2014/main" id="{C93A05C8-0669-5A45-16B4-36DD2C4386B4}"/>
+              </a:ext>
+            </a:extLst>
+          </p:cNvPr>
+          <p:cNvSpPr/>
+          <p:nvPr/>
+        </p:nvSpPr>
+        <p:spPr>
+          <a:xfrm>
+            <a:off x="0" y="0"/>
+            <a:ext cx="12192000" cy="1310640"/>
+          </a:xfrm>
+          <a:prstGeom prst="rect">
+            <a:avLst/>
+          </a:prstGeom>
+          <a:gradFill>
+            <a:gsLst>
+              <a:gs pos="0">
+                <a:srgbClr val="008BAA"/>
+              </a:gs>
+              <a:gs pos="100000">
+                <a:srgbClr val="004E68"/>
+              </a:gs>
+            </a:gsLst>
+            <a:lin ang="0" scaled="0"/>
+          </a:gradFill>
+          <a:ln>
+            <a:noFill/>
+          </a:ln>
+          <a:effectLst>
+            <a:outerShdw blurRad="50800" dist="38100" dir="2700000" algn="tl" rotWithShape="0">
+              <a:prstClr val="black">
+                <a:alpha val="40000"/>
+              </a:prstClr>
+            </a:outerShdw>
+          </a:effectLst>
+        </p:spPr>
+        <p:style>
+          <a:lnRef idx="2">
+            <a:schemeClr val="accent1">
+              <a:shade val="15000"/>
+            </a:schemeClr>
+          </a:lnRef>
+          <a:fillRef idx="1">
+            <a:schemeClr val="accent1"/>
+          </a:fillRef>
+          <a:effectRef idx="0">
+            <a:schemeClr val="accent1"/>
+          </a:effectRef>
+          <a:fontRef idx="minor">
+            <a:schemeClr val="lt1"/>
+          </a:fontRef>
+        </p:style>
+        <p:txBody>
+          <a:bodyPr rtlCol="0" anchor="ctr"/>
+          <a:lstStyle/>
+          <a:p>
+            <a:pPr algn="ctr"/>
+            <a:r>
+              <a:rPr lang="en-US" sz="4000" dirty="0" err="1">
+                <a:latin typeface="Sailec-Bold" panose="00000800000000000000" pitchFamily="2" charset="0"/>
+              </a:rPr>
+              <a:t>Controlpanel</a:t>
+            </a:r>
+            <a:endParaRPr lang="en-US" sz="4000" dirty="0">
+              <a:latin typeface="Sailec-Bold" panose="00000800000000000000" pitchFamily="2" charset="0"/>
+            </a:endParaRPr>
+          </a:p>
+        </p:txBody>
+      </p:sp>
+      <p:pic>
+        <p:nvPicPr>
+          <p:cNvPr id="4" name="Kép 3">
+            <a:extLst>
+              <a:ext uri="{FF2B5EF4-FFF2-40B4-BE49-F238E27FC236}">
+                <a16:creationId xmlns:a16="http://schemas.microsoft.com/office/drawing/2014/main" id="{B59B900C-B53B-14CA-843A-21B8F245CA2A}"/>
+              </a:ext>
+            </a:extLst>
+          </p:cNvPr>
+          <p:cNvPicPr>
+            <a:picLocks noChangeAspect="1"/>
+          </p:cNvPicPr>
+          <p:nvPr/>
+        </p:nvPicPr>
+        <p:blipFill>
+          <a:blip r:embed="rId2"/>
+          <a:stretch>
+            <a:fillRect/>
+          </a:stretch>
+        </p:blipFill>
+        <p:spPr>
+          <a:xfrm>
+            <a:off x="1500479" y="1572023"/>
+            <a:ext cx="9191042" cy="5040000"/>
+          </a:xfrm>
+          <a:prstGeom prst="rect">
+            <a:avLst/>
+          </a:prstGeom>
+          <a:effectLst>
+            <a:glow rad="63500">
+              <a:schemeClr val="accent3">
+                <a:satMod val="175000"/>
+                <a:alpha val="40000"/>
+              </a:schemeClr>
+            </a:glow>
+          </a:effectLst>
+        </p:spPr>
+      </p:pic>
+    </p:spTree>
+    <p:extLst>
+      <p:ext uri="{BB962C8B-B14F-4D97-AF65-F5344CB8AC3E}">
+        <p14:creationId xmlns:p14="http://schemas.microsoft.com/office/powerpoint/2010/main" val="1861110556"/>
       </p:ext>
     </p:extLst>
   </p:cSld>
